--- a/JammuKhoj_Pitch_Deck_Final.pptx
+++ b/JammuKhoj_Pitch_Deck_Final.pptx
@@ -3112,7 +3112,7 @@
             <a:avLst/>
           </a:prstGeom>
           <a:solidFill>
-            <a:srgbClr val="085444"/>
+            <a:srgbClr val="0B3D33"/>
           </a:solidFill>
           <a:ln>
             <a:noFill/>
@@ -3148,18 +3148,18 @@
         </p:nvSpPr>
         <p:spPr>
           <a:xfrm>
-            <a:off x="731520" y="640080"/>
-            <a:ext cx="10728655" cy="5532120"/>
+            <a:off x="640080" y="548640"/>
+            <a:ext cx="10911535" cy="5760720"/>
           </a:xfrm>
           <a:prstGeom prst="roundRect">
             <a:avLst/>
           </a:prstGeom>
           <a:solidFill>
-            <a:srgbClr val="0C2D26"/>
+            <a:srgbClr val="07241E"/>
           </a:solidFill>
           <a:ln w="19050">
             <a:solidFill>
-              <a:srgbClr val="D97706"/>
+              <a:srgbClr val="D98210"/>
             </a:solidFill>
           </a:ln>
         </p:spPr>
@@ -3185,543 +3185,9 @@
           </a:p>
         </p:txBody>
       </p:sp>
-      <p:sp>
-        <p:nvSpPr>
-          <p:cNvPr id="4" name="TextBox 3"/>
-          <p:cNvSpPr txBox="1"/>
-          <p:nvPr/>
-        </p:nvSpPr>
-        <p:spPr>
-          <a:xfrm>
-            <a:off x="1097280" y="1005840"/>
-            <a:ext cx="6858000" cy="320040"/>
-          </a:xfrm>
-          <a:prstGeom prst="rect">
-            <a:avLst/>
-          </a:prstGeom>
-          <a:noFill/>
-        </p:spPr>
-        <p:txBody>
-          <a:bodyPr wrap="none">
-            <a:spAutoFit/>
-          </a:bodyPr>
-          <a:lstStyle/>
-          <a:p>
-            <a:pPr>
-              <a:defRPr sz="1050" b="1">
-                <a:solidFill>
-                  <a:srgbClr val="D97706"/>
-                </a:solidFill>
-                <a:latin typeface="Arial"/>
-              </a:defRPr>
-            </a:pPr>
-            <a:r>
-              <a:t>OFFLINE-FIRST CIVIC TRAVEL INNOVATION • JAMMU DIVISION &amp; VAISHNO DEVI</a:t>
-            </a:r>
-          </a:p>
-        </p:txBody>
-      </p:sp>
-      <p:sp>
-        <p:nvSpPr>
-          <p:cNvPr id="5" name="TextBox 4"/>
-          <p:cNvSpPr txBox="1"/>
-          <p:nvPr/>
-        </p:nvSpPr>
-        <p:spPr>
-          <a:xfrm>
-            <a:off x="1097280" y="1371600"/>
-            <a:ext cx="6858000" cy="1371600"/>
-          </a:xfrm>
-          <a:prstGeom prst="rect">
-            <a:avLst/>
-          </a:prstGeom>
-          <a:noFill/>
-        </p:spPr>
-        <p:txBody>
-          <a:bodyPr wrap="none">
-            <a:spAutoFit/>
-          </a:bodyPr>
-          <a:lstStyle/>
-          <a:p>
-            <a:pPr>
-              <a:defRPr sz="4400" b="1">
-                <a:solidFill>
-                  <a:srgbClr val="FFFFFF"/>
-                </a:solidFill>
-                <a:latin typeface="Georgia"/>
-              </a:defRPr>
-            </a:pPr>
-            <a:r>
-              <a:t>JammuKhoj</a:t>
-            </a:r>
-          </a:p>
-          <a:p>
-            <a:pPr>
-              <a:defRPr sz="1800">
-                <a:solidFill>
-                  <a:srgbClr val="D97706"/>
-                </a:solidFill>
-                <a:latin typeface="Arial"/>
-              </a:defRPr>
-            </a:pPr>
-            <a:r>
-              <a:t>जम्मू खोज • Your Jammu Journey, Made Simple.</a:t>
-            </a:r>
-          </a:p>
-        </p:txBody>
-      </p:sp>
-      <p:sp>
-        <p:nvSpPr>
-          <p:cNvPr id="6" name="TextBox 5"/>
-          <p:cNvSpPr txBox="1"/>
-          <p:nvPr/>
-        </p:nvSpPr>
-        <p:spPr>
-          <a:xfrm>
-            <a:off x="1097280" y="2834640"/>
-            <a:ext cx="6583680" cy="1188720"/>
-          </a:xfrm>
-          <a:prstGeom prst="rect">
-            <a:avLst/>
-          </a:prstGeom>
-          <a:noFill/>
-        </p:spPr>
-        <p:txBody>
-          <a:bodyPr wrap="none">
-            <a:spAutoFit/>
-          </a:bodyPr>
-          <a:lstStyle/>
-          <a:p>
-            <a:pPr>
-              <a:defRPr sz="1300">
-                <a:solidFill>
-                  <a:srgbClr val="FFFFFF"/>
-                </a:solidFill>
-                <a:latin typeface="Arial"/>
-              </a:defRPr>
-            </a:pPr>
-            <a:r>
-              <a:t>A production-ready progressive web app &amp; Android platform engineered for transit layovers and Mata Vaishno Devi pilgrims across the Jammu Division. 100% offline-ready with conservative train/flight safety buffers, transparent transport fare matrices, step-free senior guidance, and zero-tracking privacy.</a:t>
-            </a:r>
-          </a:p>
-        </p:txBody>
-      </p:sp>
-      <p:sp>
-        <p:nvSpPr>
-          <p:cNvPr id="7" name="Rounded Rectangle 6"/>
-          <p:cNvSpPr/>
-          <p:nvPr/>
-        </p:nvSpPr>
-        <p:spPr>
-          <a:xfrm>
-            <a:off x="1097280" y="4206240"/>
-            <a:ext cx="3154680" cy="777240"/>
-          </a:xfrm>
-          <a:prstGeom prst="roundRect">
-            <a:avLst/>
-          </a:prstGeom>
-          <a:solidFill>
-            <a:srgbClr val="085444"/>
-          </a:solidFill>
-          <a:ln w="12700">
-            <a:solidFill>
-              <a:srgbClr val="D97706"/>
-            </a:solidFill>
-          </a:ln>
-        </p:spPr>
-        <p:style>
-          <a:lnRef idx="1">
-            <a:schemeClr val="accent1"/>
-          </a:lnRef>
-          <a:fillRef idx="3">
-            <a:schemeClr val="accent1"/>
-          </a:fillRef>
-          <a:effectRef idx="2">
-            <a:schemeClr val="accent1"/>
-          </a:effectRef>
-          <a:fontRef idx="minor">
-            <a:schemeClr val="lt1"/>
-          </a:fontRef>
-        </p:style>
-        <p:txBody>
-          <a:bodyPr rtlCol="0" anchor="ctr"/>
-          <a:lstStyle/>
-          <a:p>
-            <a:pPr algn="ctr"/>
-          </a:p>
-        </p:txBody>
-      </p:sp>
-      <p:sp>
-        <p:nvSpPr>
-          <p:cNvPr id="8" name="TextBox 7"/>
-          <p:cNvSpPr txBox="1"/>
-          <p:nvPr/>
-        </p:nvSpPr>
-        <p:spPr>
-          <a:xfrm>
-            <a:off x="1188720" y="4279392"/>
-            <a:ext cx="2971800" cy="640080"/>
-          </a:xfrm>
-          <a:prstGeom prst="rect">
-            <a:avLst/>
-          </a:prstGeom>
-          <a:noFill/>
-        </p:spPr>
-        <p:txBody>
-          <a:bodyPr wrap="none">
-            <a:spAutoFit/>
-          </a:bodyPr>
-          <a:lstStyle/>
-          <a:p>
-            <a:pPr>
-              <a:defRPr sz="1100" b="1">
-                <a:solidFill>
-                  <a:srgbClr val="D97706"/>
-                </a:solidFill>
-              </a:defRPr>
-            </a:pPr>
-            <a:r>
-              <a:t>⚡ 1-Tap Buffer Planner</a:t>
-            </a:r>
-          </a:p>
-          <a:p>
-            <a:pPr>
-              <a:defRPr sz="950">
-                <a:solidFill>
-                  <a:srgbClr val="FFFFFF"/>
-                </a:solidFill>
-              </a:defRPr>
-            </a:pPr>
-            <a:r>
-              <a:t>4h, 8h &amp; 24h layover circuits</a:t>
-            </a:r>
-          </a:p>
-        </p:txBody>
-      </p:sp>
-      <p:sp>
-        <p:nvSpPr>
-          <p:cNvPr id="9" name="Rounded Rectangle 8"/>
-          <p:cNvSpPr/>
-          <p:nvPr/>
-        </p:nvSpPr>
-        <p:spPr>
-          <a:xfrm>
-            <a:off x="4389120" y="4206240"/>
-            <a:ext cx="3154680" cy="777240"/>
-          </a:xfrm>
-          <a:prstGeom prst="roundRect">
-            <a:avLst/>
-          </a:prstGeom>
-          <a:solidFill>
-            <a:srgbClr val="085444"/>
-          </a:solidFill>
-          <a:ln w="12700">
-            <a:solidFill>
-              <a:srgbClr val="D97706"/>
-            </a:solidFill>
-          </a:ln>
-        </p:spPr>
-        <p:style>
-          <a:lnRef idx="1">
-            <a:schemeClr val="accent1"/>
-          </a:lnRef>
-          <a:fillRef idx="3">
-            <a:schemeClr val="accent1"/>
-          </a:fillRef>
-          <a:effectRef idx="2">
-            <a:schemeClr val="accent1"/>
-          </a:effectRef>
-          <a:fontRef idx="minor">
-            <a:schemeClr val="lt1"/>
-          </a:fontRef>
-        </p:style>
-        <p:txBody>
-          <a:bodyPr rtlCol="0" anchor="ctr"/>
-          <a:lstStyle/>
-          <a:p>
-            <a:pPr algn="ctr"/>
-          </a:p>
-        </p:txBody>
-      </p:sp>
-      <p:sp>
-        <p:nvSpPr>
-          <p:cNvPr id="10" name="TextBox 9"/>
-          <p:cNvSpPr txBox="1"/>
-          <p:nvPr/>
-        </p:nvSpPr>
-        <p:spPr>
-          <a:xfrm>
-            <a:off x="4480560" y="4279392"/>
-            <a:ext cx="2971800" cy="640080"/>
-          </a:xfrm>
-          <a:prstGeom prst="rect">
-            <a:avLst/>
-          </a:prstGeom>
-          <a:noFill/>
-        </p:spPr>
-        <p:txBody>
-          <a:bodyPr wrap="none">
-            <a:spAutoFit/>
-          </a:bodyPr>
-          <a:lstStyle/>
-          <a:p>
-            <a:pPr>
-              <a:defRPr sz="1100" b="1">
-                <a:solidFill>
-                  <a:srgbClr val="D97706"/>
-                </a:solidFill>
-              </a:defRPr>
-            </a:pPr>
-            <a:r>
-              <a:t>📶 100% Offline IndexedDB</a:t>
-            </a:r>
-          </a:p>
-          <a:p>
-            <a:pPr>
-              <a:defRPr sz="950">
-                <a:solidFill>
-                  <a:srgbClr val="FFFFFF"/>
-                </a:solidFill>
-              </a:defRPr>
-            </a:pPr>
-            <a:r>
-              <a:t>Vector maps &amp; full routing offline</a:t>
-            </a:r>
-          </a:p>
-        </p:txBody>
-      </p:sp>
-      <p:sp>
-        <p:nvSpPr>
-          <p:cNvPr id="11" name="Rounded Rectangle 10"/>
-          <p:cNvSpPr/>
-          <p:nvPr/>
-        </p:nvSpPr>
-        <p:spPr>
-          <a:xfrm>
-            <a:off x="1097280" y="5074920"/>
-            <a:ext cx="3154680" cy="777240"/>
-          </a:xfrm>
-          <a:prstGeom prst="roundRect">
-            <a:avLst/>
-          </a:prstGeom>
-          <a:solidFill>
-            <a:srgbClr val="085444"/>
-          </a:solidFill>
-          <a:ln w="12700">
-            <a:solidFill>
-              <a:srgbClr val="D97706"/>
-            </a:solidFill>
-          </a:ln>
-        </p:spPr>
-        <p:style>
-          <a:lnRef idx="1">
-            <a:schemeClr val="accent1"/>
-          </a:lnRef>
-          <a:fillRef idx="3">
-            <a:schemeClr val="accent1"/>
-          </a:fillRef>
-          <a:effectRef idx="2">
-            <a:schemeClr val="accent1"/>
-          </a:effectRef>
-          <a:fontRef idx="minor">
-            <a:schemeClr val="lt1"/>
-          </a:fontRef>
-        </p:style>
-        <p:txBody>
-          <a:bodyPr rtlCol="0" anchor="ctr"/>
-          <a:lstStyle/>
-          <a:p>
-            <a:pPr algn="ctr"/>
-          </a:p>
-        </p:txBody>
-      </p:sp>
-      <p:sp>
-        <p:nvSpPr>
-          <p:cNvPr id="12" name="TextBox 11"/>
-          <p:cNvSpPr txBox="1"/>
-          <p:nvPr/>
-        </p:nvSpPr>
-        <p:spPr>
-          <a:xfrm>
-            <a:off x="1188720" y="5148072"/>
-            <a:ext cx="2971800" cy="640080"/>
-          </a:xfrm>
-          <a:prstGeom prst="rect">
-            <a:avLst/>
-          </a:prstGeom>
-          <a:noFill/>
-        </p:spPr>
-        <p:txBody>
-          <a:bodyPr wrap="none">
-            <a:spAutoFit/>
-          </a:bodyPr>
-          <a:lstStyle/>
-          <a:p>
-            <a:pPr>
-              <a:defRPr sz="1100" b="1">
-                <a:solidFill>
-                  <a:srgbClr val="D97706"/>
-                </a:solidFill>
-              </a:defRPr>
-            </a:pPr>
-            <a:r>
-              <a:t>🚌 Transparent Transit</a:t>
-            </a:r>
-          </a:p>
-          <a:p>
-            <a:pPr>
-              <a:defRPr sz="950">
-                <a:solidFill>
-                  <a:srgbClr val="FFFFFF"/>
-                </a:solidFill>
-              </a:defRPr>
-            </a:pPr>
-            <a:r>
-              <a:t>Matadors (₹10-25), Autos &amp; Taxis</a:t>
-            </a:r>
-          </a:p>
-        </p:txBody>
-      </p:sp>
-      <p:sp>
-        <p:nvSpPr>
-          <p:cNvPr id="13" name="Rounded Rectangle 12"/>
-          <p:cNvSpPr/>
-          <p:nvPr/>
-        </p:nvSpPr>
-        <p:spPr>
-          <a:xfrm>
-            <a:off x="4389120" y="5074920"/>
-            <a:ext cx="3154680" cy="777240"/>
-          </a:xfrm>
-          <a:prstGeom prst="roundRect">
-            <a:avLst/>
-          </a:prstGeom>
-          <a:solidFill>
-            <a:srgbClr val="085444"/>
-          </a:solidFill>
-          <a:ln w="12700">
-            <a:solidFill>
-              <a:srgbClr val="D97706"/>
-            </a:solidFill>
-          </a:ln>
-        </p:spPr>
-        <p:style>
-          <a:lnRef idx="1">
-            <a:schemeClr val="accent1"/>
-          </a:lnRef>
-          <a:fillRef idx="3">
-            <a:schemeClr val="accent1"/>
-          </a:fillRef>
-          <a:effectRef idx="2">
-            <a:schemeClr val="accent1"/>
-          </a:effectRef>
-          <a:fontRef idx="minor">
-            <a:schemeClr val="lt1"/>
-          </a:fontRef>
-        </p:style>
-        <p:txBody>
-          <a:bodyPr rtlCol="0" anchor="ctr"/>
-          <a:lstStyle/>
-          <a:p>
-            <a:pPr algn="ctr"/>
-          </a:p>
-        </p:txBody>
-      </p:sp>
-      <p:sp>
-        <p:nvSpPr>
-          <p:cNvPr id="14" name="TextBox 13"/>
-          <p:cNvSpPr txBox="1"/>
-          <p:nvPr/>
-        </p:nvSpPr>
-        <p:spPr>
-          <a:xfrm>
-            <a:off x="4480560" y="5148072"/>
-            <a:ext cx="2971800" cy="640080"/>
-          </a:xfrm>
-          <a:prstGeom prst="rect">
-            <a:avLst/>
-          </a:prstGeom>
-          <a:noFill/>
-        </p:spPr>
-        <p:txBody>
-          <a:bodyPr wrap="none">
-            <a:spAutoFit/>
-          </a:bodyPr>
-          <a:lstStyle/>
-          <a:p>
-            <a:pPr>
-              <a:defRPr sz="1100" b="1">
-                <a:solidFill>
-                  <a:srgbClr val="D97706"/>
-                </a:solidFill>
-              </a:defRPr>
-            </a:pPr>
-            <a:r>
-              <a:t>🧓 Senior &amp; Pilgrim Ease</a:t>
-            </a:r>
-          </a:p>
-          <a:p>
-            <a:pPr>
-              <a:defRPr sz="950">
-                <a:solidFill>
-                  <a:srgbClr val="FFFFFF"/>
-                </a:solidFill>
-              </a:defRPr>
-            </a:pPr>
-            <a:r>
-              <a:t>Step-free, battery cars &amp; 112 SOS</a:t>
-            </a:r>
-          </a:p>
-        </p:txBody>
-      </p:sp>
-      <p:sp>
-        <p:nvSpPr>
-          <p:cNvPr id="15" name="Rounded Rectangle 14"/>
-          <p:cNvSpPr/>
-          <p:nvPr/>
-        </p:nvSpPr>
-        <p:spPr>
-          <a:xfrm>
-            <a:off x="8046720" y="1051560"/>
-            <a:ext cx="2651760" cy="4709160"/>
-          </a:xfrm>
-          <a:prstGeom prst="roundRect">
-            <a:avLst/>
-          </a:prstGeom>
-          <a:solidFill>
-            <a:srgbClr val="121816"/>
-          </a:solidFill>
-          <a:ln w="19050">
-            <a:solidFill>
-              <a:srgbClr val="D97706"/>
-            </a:solidFill>
-          </a:ln>
-        </p:spPr>
-        <p:style>
-          <a:lnRef idx="1">
-            <a:schemeClr val="accent1"/>
-          </a:lnRef>
-          <a:fillRef idx="3">
-            <a:schemeClr val="accent1"/>
-          </a:fillRef>
-          <a:effectRef idx="2">
-            <a:schemeClr val="accent1"/>
-          </a:effectRef>
-          <a:fontRef idx="minor">
-            <a:schemeClr val="lt1"/>
-          </a:fontRef>
-        </p:style>
-        <p:txBody>
-          <a:bodyPr rtlCol="0" anchor="ctr"/>
-          <a:lstStyle/>
-          <a:p>
-            <a:pPr algn="ctr"/>
-          </a:p>
-        </p:txBody>
-      </p:sp>
       <p:pic>
         <p:nvPicPr>
-          <p:cNvPr id="16" name="Picture 15" descr="app_home_planner.png"/>
+          <p:cNvPr id="4" name="Picture 3" descr="app_logo.png"/>
           <p:cNvPicPr>
             <a:picLocks noChangeAspect="1"/>
           </p:cNvPicPr>
@@ -3735,14 +3201,538 @@
         </p:blipFill>
         <p:spPr>
           <a:xfrm>
-            <a:off x="8119872" y="1124712"/>
-            <a:ext cx="2505456" cy="4562856"/>
+            <a:off x="5272887" y="960120"/>
+            <a:ext cx="1645920" cy="1645920"/>
           </a:xfrm>
           <a:prstGeom prst="rect">
             <a:avLst/>
           </a:prstGeom>
         </p:spPr>
       </p:pic>
+      <p:sp>
+        <p:nvSpPr>
+          <p:cNvPr id="5" name="TextBox 4"/>
+          <p:cNvSpPr txBox="1"/>
+          <p:nvPr/>
+        </p:nvSpPr>
+        <p:spPr>
+          <a:xfrm>
+            <a:off x="1371600" y="2697480"/>
+            <a:ext cx="9448495" cy="320040"/>
+          </a:xfrm>
+          <a:prstGeom prst="rect">
+            <a:avLst/>
+          </a:prstGeom>
+          <a:noFill/>
+        </p:spPr>
+        <p:txBody>
+          <a:bodyPr wrap="square">
+            <a:spAutoFit/>
+          </a:bodyPr>
+          <a:lstStyle/>
+          <a:p>
+            <a:pPr algn="ctr">
+              <a:defRPr sz="1050" b="1">
+                <a:solidFill>
+                  <a:srgbClr val="D98210"/>
+                </a:solidFill>
+                <a:latin typeface="Arial"/>
+              </a:defRPr>
+            </a:pPr>
+            <a:r>
+              <a:t>OFFLINE-FIRST CIVIC TRAVEL INNOVATION • JAMMU DIVISION &amp; VAISHNO DEVI</a:t>
+            </a:r>
+          </a:p>
+        </p:txBody>
+      </p:sp>
+      <p:sp>
+        <p:nvSpPr>
+          <p:cNvPr id="6" name="TextBox 5"/>
+          <p:cNvSpPr txBox="1"/>
+          <p:nvPr/>
+        </p:nvSpPr>
+        <p:spPr>
+          <a:xfrm>
+            <a:off x="1371600" y="3017520"/>
+            <a:ext cx="9448495" cy="1051560"/>
+          </a:xfrm>
+          <a:prstGeom prst="rect">
+            <a:avLst/>
+          </a:prstGeom>
+          <a:noFill/>
+        </p:spPr>
+        <p:txBody>
+          <a:bodyPr wrap="square">
+            <a:spAutoFit/>
+          </a:bodyPr>
+          <a:lstStyle/>
+          <a:p>
+            <a:pPr algn="ctr">
+              <a:defRPr sz="4600" b="1">
+                <a:solidFill>
+                  <a:srgbClr val="FFFFFF"/>
+                </a:solidFill>
+                <a:latin typeface="Georgia"/>
+              </a:defRPr>
+            </a:pPr>
+            <a:r>
+              <a:t>JammuKhoj</a:t>
+            </a:r>
+          </a:p>
+          <a:p>
+            <a:pPr algn="ctr">
+              <a:defRPr sz="1650">
+                <a:solidFill>
+                  <a:srgbClr val="D98210"/>
+                </a:solidFill>
+                <a:latin typeface="Arial"/>
+              </a:defRPr>
+            </a:pPr>
+            <a:r>
+              <a:t>जम्मू खोज • Your Jammu Journey, Made Simple.</a:t>
+            </a:r>
+          </a:p>
+        </p:txBody>
+      </p:sp>
+      <p:sp>
+        <p:nvSpPr>
+          <p:cNvPr id="7" name="TextBox 6"/>
+          <p:cNvSpPr txBox="1"/>
+          <p:nvPr/>
+        </p:nvSpPr>
+        <p:spPr>
+          <a:xfrm>
+            <a:off x="1828800" y="4160520"/>
+            <a:ext cx="8534095" cy="685800"/>
+          </a:xfrm>
+          <a:prstGeom prst="rect">
+            <a:avLst/>
+          </a:prstGeom>
+          <a:noFill/>
+        </p:spPr>
+        <p:txBody>
+          <a:bodyPr wrap="square">
+            <a:spAutoFit/>
+          </a:bodyPr>
+          <a:lstStyle/>
+          <a:p>
+            <a:pPr algn="ctr">
+              <a:defRPr sz="1200">
+                <a:solidFill>
+                  <a:srgbClr val="FFFFFF"/>
+                </a:solidFill>
+                <a:latin typeface="Arial"/>
+              </a:defRPr>
+            </a:pPr>
+            <a:r>
+              <a:t>A production-ready progressive web app &amp; Android platform engineered for transit layovers and Mata Vaishno Devi pilgrims. 100% offline-ready with conservative train/flight safety buffers, transparent transport fare matrices, step-free senior guidance, and zero-tracking privacy.</a:t>
+            </a:r>
+          </a:p>
+        </p:txBody>
+      </p:sp>
+      <p:sp>
+        <p:nvSpPr>
+          <p:cNvPr id="8" name="Rounded Rectangle 7"/>
+          <p:cNvSpPr/>
+          <p:nvPr/>
+        </p:nvSpPr>
+        <p:spPr>
+          <a:xfrm>
+            <a:off x="1051560" y="4937760"/>
+            <a:ext cx="2423160" cy="749808"/>
+          </a:xfrm>
+          <a:prstGeom prst="roundRect">
+            <a:avLst/>
+          </a:prstGeom>
+          <a:solidFill>
+            <a:srgbClr val="0B3D33"/>
+          </a:solidFill>
+          <a:ln w="12700">
+            <a:solidFill>
+              <a:srgbClr val="D98210"/>
+            </a:solidFill>
+          </a:ln>
+        </p:spPr>
+        <p:style>
+          <a:lnRef idx="1">
+            <a:schemeClr val="accent1"/>
+          </a:lnRef>
+          <a:fillRef idx="3">
+            <a:schemeClr val="accent1"/>
+          </a:fillRef>
+          <a:effectRef idx="2">
+            <a:schemeClr val="accent1"/>
+          </a:effectRef>
+          <a:fontRef idx="minor">
+            <a:schemeClr val="lt1"/>
+          </a:fontRef>
+        </p:style>
+        <p:txBody>
+          <a:bodyPr rtlCol="0" anchor="ctr"/>
+          <a:lstStyle/>
+          <a:p>
+            <a:pPr algn="ctr"/>
+          </a:p>
+        </p:txBody>
+      </p:sp>
+      <p:sp>
+        <p:nvSpPr>
+          <p:cNvPr id="9" name="TextBox 8"/>
+          <p:cNvSpPr txBox="1"/>
+          <p:nvPr/>
+        </p:nvSpPr>
+        <p:spPr>
+          <a:xfrm>
+            <a:off x="1124712" y="4992624"/>
+            <a:ext cx="2286000" cy="640080"/>
+          </a:xfrm>
+          <a:prstGeom prst="rect">
+            <a:avLst/>
+          </a:prstGeom>
+          <a:noFill/>
+        </p:spPr>
+        <p:txBody>
+          <a:bodyPr wrap="square">
+            <a:spAutoFit/>
+          </a:bodyPr>
+          <a:lstStyle/>
+          <a:p>
+            <a:pPr algn="ctr">
+              <a:defRPr sz="1000" b="1">
+                <a:solidFill>
+                  <a:srgbClr val="D98210"/>
+                </a:solidFill>
+              </a:defRPr>
+            </a:pPr>
+            <a:r>
+              <a:t>⚡ 1-Tap Buffer Planner</a:t>
+            </a:r>
+          </a:p>
+          <a:p>
+            <a:pPr algn="ctr">
+              <a:defRPr sz="850">
+                <a:solidFill>
+                  <a:srgbClr val="FFFFFF"/>
+                </a:solidFill>
+              </a:defRPr>
+            </a:pPr>
+            <a:r>
+              <a:t>4h, 8h &amp; 24h layover circuits</a:t>
+            </a:r>
+          </a:p>
+        </p:txBody>
+      </p:sp>
+      <p:sp>
+        <p:nvSpPr>
+          <p:cNvPr id="10" name="Rounded Rectangle 9"/>
+          <p:cNvSpPr/>
+          <p:nvPr/>
+        </p:nvSpPr>
+        <p:spPr>
+          <a:xfrm>
+            <a:off x="3593591" y="4937760"/>
+            <a:ext cx="2423160" cy="749808"/>
+          </a:xfrm>
+          <a:prstGeom prst="roundRect">
+            <a:avLst/>
+          </a:prstGeom>
+          <a:solidFill>
+            <a:srgbClr val="0B3D33"/>
+          </a:solidFill>
+          <a:ln w="12700">
+            <a:solidFill>
+              <a:srgbClr val="D98210"/>
+            </a:solidFill>
+          </a:ln>
+        </p:spPr>
+        <p:style>
+          <a:lnRef idx="1">
+            <a:schemeClr val="accent1"/>
+          </a:lnRef>
+          <a:fillRef idx="3">
+            <a:schemeClr val="accent1"/>
+          </a:fillRef>
+          <a:effectRef idx="2">
+            <a:schemeClr val="accent1"/>
+          </a:effectRef>
+          <a:fontRef idx="minor">
+            <a:schemeClr val="lt1"/>
+          </a:fontRef>
+        </p:style>
+        <p:txBody>
+          <a:bodyPr rtlCol="0" anchor="ctr"/>
+          <a:lstStyle/>
+          <a:p>
+            <a:pPr algn="ctr"/>
+          </a:p>
+        </p:txBody>
+      </p:sp>
+      <p:sp>
+        <p:nvSpPr>
+          <p:cNvPr id="11" name="TextBox 10"/>
+          <p:cNvSpPr txBox="1"/>
+          <p:nvPr/>
+        </p:nvSpPr>
+        <p:spPr>
+          <a:xfrm>
+            <a:off x="3666743" y="4992624"/>
+            <a:ext cx="2286000" cy="640080"/>
+          </a:xfrm>
+          <a:prstGeom prst="rect">
+            <a:avLst/>
+          </a:prstGeom>
+          <a:noFill/>
+        </p:spPr>
+        <p:txBody>
+          <a:bodyPr wrap="square">
+            <a:spAutoFit/>
+          </a:bodyPr>
+          <a:lstStyle/>
+          <a:p>
+            <a:pPr algn="ctr">
+              <a:defRPr sz="1000" b="1">
+                <a:solidFill>
+                  <a:srgbClr val="D98210"/>
+                </a:solidFill>
+              </a:defRPr>
+            </a:pPr>
+            <a:r>
+              <a:t>📶 100% Offline IndexedDB</a:t>
+            </a:r>
+          </a:p>
+          <a:p>
+            <a:pPr algn="ctr">
+              <a:defRPr sz="850">
+                <a:solidFill>
+                  <a:srgbClr val="FFFFFF"/>
+                </a:solidFill>
+              </a:defRPr>
+            </a:pPr>
+            <a:r>
+              <a:t>Vector maps &amp; full routing offline</a:t>
+            </a:r>
+          </a:p>
+        </p:txBody>
+      </p:sp>
+      <p:sp>
+        <p:nvSpPr>
+          <p:cNvPr id="12" name="Rounded Rectangle 11"/>
+          <p:cNvSpPr/>
+          <p:nvPr/>
+        </p:nvSpPr>
+        <p:spPr>
+          <a:xfrm>
+            <a:off x="6135623" y="4937760"/>
+            <a:ext cx="2423160" cy="749808"/>
+          </a:xfrm>
+          <a:prstGeom prst="roundRect">
+            <a:avLst/>
+          </a:prstGeom>
+          <a:solidFill>
+            <a:srgbClr val="0B3D33"/>
+          </a:solidFill>
+          <a:ln w="12700">
+            <a:solidFill>
+              <a:srgbClr val="D98210"/>
+            </a:solidFill>
+          </a:ln>
+        </p:spPr>
+        <p:style>
+          <a:lnRef idx="1">
+            <a:schemeClr val="accent1"/>
+          </a:lnRef>
+          <a:fillRef idx="3">
+            <a:schemeClr val="accent1"/>
+          </a:fillRef>
+          <a:effectRef idx="2">
+            <a:schemeClr val="accent1"/>
+          </a:effectRef>
+          <a:fontRef idx="minor">
+            <a:schemeClr val="lt1"/>
+          </a:fontRef>
+        </p:style>
+        <p:txBody>
+          <a:bodyPr rtlCol="0" anchor="ctr"/>
+          <a:lstStyle/>
+          <a:p>
+            <a:pPr algn="ctr"/>
+          </a:p>
+        </p:txBody>
+      </p:sp>
+      <p:sp>
+        <p:nvSpPr>
+          <p:cNvPr id="13" name="TextBox 12"/>
+          <p:cNvSpPr txBox="1"/>
+          <p:nvPr/>
+        </p:nvSpPr>
+        <p:spPr>
+          <a:xfrm>
+            <a:off x="6208775" y="4992624"/>
+            <a:ext cx="2286000" cy="640080"/>
+          </a:xfrm>
+          <a:prstGeom prst="rect">
+            <a:avLst/>
+          </a:prstGeom>
+          <a:noFill/>
+        </p:spPr>
+        <p:txBody>
+          <a:bodyPr wrap="square">
+            <a:spAutoFit/>
+          </a:bodyPr>
+          <a:lstStyle/>
+          <a:p>
+            <a:pPr algn="ctr">
+              <a:defRPr sz="1000" b="1">
+                <a:solidFill>
+                  <a:srgbClr val="D98210"/>
+                </a:solidFill>
+              </a:defRPr>
+            </a:pPr>
+            <a:r>
+              <a:t>🚌 Transparent Transit</a:t>
+            </a:r>
+          </a:p>
+          <a:p>
+            <a:pPr algn="ctr">
+              <a:defRPr sz="850">
+                <a:solidFill>
+                  <a:srgbClr val="FFFFFF"/>
+                </a:solidFill>
+              </a:defRPr>
+            </a:pPr>
+            <a:r>
+              <a:t>Matadors (₹10-25), Autos &amp; Taxis</a:t>
+            </a:r>
+          </a:p>
+        </p:txBody>
+      </p:sp>
+      <p:sp>
+        <p:nvSpPr>
+          <p:cNvPr id="14" name="Rounded Rectangle 13"/>
+          <p:cNvSpPr/>
+          <p:nvPr/>
+        </p:nvSpPr>
+        <p:spPr>
+          <a:xfrm>
+            <a:off x="8677656" y="4937760"/>
+            <a:ext cx="2423160" cy="749808"/>
+          </a:xfrm>
+          <a:prstGeom prst="roundRect">
+            <a:avLst/>
+          </a:prstGeom>
+          <a:solidFill>
+            <a:srgbClr val="0B3D33"/>
+          </a:solidFill>
+          <a:ln w="12700">
+            <a:solidFill>
+              <a:srgbClr val="D98210"/>
+            </a:solidFill>
+          </a:ln>
+        </p:spPr>
+        <p:style>
+          <a:lnRef idx="1">
+            <a:schemeClr val="accent1"/>
+          </a:lnRef>
+          <a:fillRef idx="3">
+            <a:schemeClr val="accent1"/>
+          </a:fillRef>
+          <a:effectRef idx="2">
+            <a:schemeClr val="accent1"/>
+          </a:effectRef>
+          <a:fontRef idx="minor">
+            <a:schemeClr val="lt1"/>
+          </a:fontRef>
+        </p:style>
+        <p:txBody>
+          <a:bodyPr rtlCol="0" anchor="ctr"/>
+          <a:lstStyle/>
+          <a:p>
+            <a:pPr algn="ctr"/>
+          </a:p>
+        </p:txBody>
+      </p:sp>
+      <p:sp>
+        <p:nvSpPr>
+          <p:cNvPr id="15" name="TextBox 14"/>
+          <p:cNvSpPr txBox="1"/>
+          <p:nvPr/>
+        </p:nvSpPr>
+        <p:spPr>
+          <a:xfrm>
+            <a:off x="8750808" y="4992624"/>
+            <a:ext cx="2286000" cy="640080"/>
+          </a:xfrm>
+          <a:prstGeom prst="rect">
+            <a:avLst/>
+          </a:prstGeom>
+          <a:noFill/>
+        </p:spPr>
+        <p:txBody>
+          <a:bodyPr wrap="square">
+            <a:spAutoFit/>
+          </a:bodyPr>
+          <a:lstStyle/>
+          <a:p>
+            <a:pPr algn="ctr">
+              <a:defRPr sz="1000" b="1">
+                <a:solidFill>
+                  <a:srgbClr val="D98210"/>
+                </a:solidFill>
+              </a:defRPr>
+            </a:pPr>
+            <a:r>
+              <a:t>🧓 Senior &amp; Pilgrim Ease</a:t>
+            </a:r>
+          </a:p>
+          <a:p>
+            <a:pPr algn="ctr">
+              <a:defRPr sz="850">
+                <a:solidFill>
+                  <a:srgbClr val="FFFFFF"/>
+                </a:solidFill>
+              </a:defRPr>
+            </a:pPr>
+            <a:r>
+              <a:t>Step-free, battery cars &amp; 112 SOS</a:t>
+            </a:r>
+          </a:p>
+        </p:txBody>
+      </p:sp>
+      <p:sp>
+        <p:nvSpPr>
+          <p:cNvPr id="16" name="TextBox 15"/>
+          <p:cNvSpPr txBox="1"/>
+          <p:nvPr/>
+        </p:nvSpPr>
+        <p:spPr>
+          <a:xfrm>
+            <a:off x="1371600" y="5833872"/>
+            <a:ext cx="9448495" cy="320040"/>
+          </a:xfrm>
+          <a:prstGeom prst="rect">
+            <a:avLst/>
+          </a:prstGeom>
+          <a:noFill/>
+        </p:spPr>
+        <p:txBody>
+          <a:bodyPr wrap="none">
+            <a:spAutoFit/>
+          </a:bodyPr>
+          <a:lstStyle/>
+          <a:p>
+            <a:pPr algn="ctr">
+              <a:defRPr sz="950">
+                <a:solidFill>
+                  <a:srgbClr val="B4C8C0"/>
+                </a:solidFill>
+              </a:defRPr>
+            </a:pPr>
+            <a:r>
+              <a:t>Production Release • October 2026 • Live Demo: https://jammukhoj.in • 44/44 Verified High-Level Tests Passing</a:t>
+            </a:r>
+          </a:p>
+        </p:txBody>
+      </p:sp>
     </p:spTree>
   </p:cSld>
   <p:clrMapOvr>
@@ -3776,7 +3766,7 @@
             <a:avLst/>
           </a:prstGeom>
           <a:solidFill>
-            <a:srgbClr val="085444"/>
+            <a:srgbClr val="0B3D33"/>
           </a:solidFill>
           <a:ln>
             <a:noFill/>
@@ -3812,18 +3802,18 @@
         </p:nvSpPr>
         <p:spPr>
           <a:xfrm>
-            <a:off x="731520" y="640080"/>
-            <a:ext cx="10728655" cy="5532120"/>
+            <a:off x="640080" y="548640"/>
+            <a:ext cx="10911535" cy="5760720"/>
           </a:xfrm>
           <a:prstGeom prst="roundRect">
             <a:avLst/>
           </a:prstGeom>
           <a:solidFill>
-            <a:srgbClr val="0C2D26"/>
+            <a:srgbClr val="07241E"/>
           </a:solidFill>
           <a:ln w="19050">
             <a:solidFill>
-              <a:srgbClr val="D97706"/>
+              <a:srgbClr val="D98210"/>
             </a:solidFill>
           </a:ln>
         </p:spPr>
@@ -3857,8 +3847,8 @@
         </p:nvSpPr>
         <p:spPr>
           <a:xfrm>
-            <a:off x="1097280" y="914400"/>
-            <a:ext cx="9144000" cy="320040"/>
+            <a:off x="1097280" y="822960"/>
+            <a:ext cx="9601200" cy="320040"/>
           </a:xfrm>
           <a:prstGeom prst="rect">
             <a:avLst/>
@@ -3874,7 +3864,7 @@
             <a:pPr>
               <a:defRPr sz="1050" b="1">
                 <a:solidFill>
-                  <a:srgbClr val="D97706"/>
+                  <a:srgbClr val="D98210"/>
                 </a:solidFill>
               </a:defRPr>
             </a:pPr>
@@ -3892,8 +3882,8 @@
         </p:nvSpPr>
         <p:spPr>
           <a:xfrm>
-            <a:off x="1097280" y="1234440"/>
-            <a:ext cx="9601200" cy="1005840"/>
+            <a:off x="1097280" y="1143000"/>
+            <a:ext cx="9601200" cy="1051560"/>
           </a:xfrm>
           <a:prstGeom prst="rect">
             <a:avLst/>
@@ -3907,7 +3897,7 @@
           <a:lstStyle/>
           <a:p>
             <a:pPr>
-              <a:defRPr sz="3400" b="1">
+              <a:defRPr sz="3600" b="1">
                 <a:solidFill>
                   <a:srgbClr val="FFFFFF"/>
                 </a:solidFill>
@@ -3920,14 +3910,14 @@
           </a:p>
           <a:p>
             <a:pPr>
-              <a:defRPr sz="1500">
-                <a:solidFill>
-                  <a:srgbClr val="D97706"/>
-                </a:solidFill>
-              </a:defRPr>
-            </a:pPr>
-            <a:r>
-              <a:t>Let's turn a hurried 2-hour transit rush into an enriching, safe cultural gateway.</a:t>
+              <a:defRPr sz="1400">
+                <a:solidFill>
+                  <a:srgbClr val="D98210"/>
+                </a:solidFill>
+              </a:defRPr>
+            </a:pPr>
+            <a:r>
+              <a:t>Turn a hurried 2-hour transit rush into an enriching, safe cultural gateway for 10 million yatris.</a:t>
             </a:r>
           </a:p>
         </p:txBody>
@@ -3940,18 +3930,18 @@
         </p:nvSpPr>
         <p:spPr>
           <a:xfrm>
-            <a:off x="1097280" y="2468880"/>
-            <a:ext cx="3154680" cy="2148840"/>
+            <a:off x="1097280" y="2423160"/>
+            <a:ext cx="3154680" cy="2194560"/>
           </a:xfrm>
           <a:prstGeom prst="roundRect">
             <a:avLst/>
           </a:prstGeom>
           <a:solidFill>
-            <a:srgbClr val="085444"/>
+            <a:srgbClr val="0B3D33"/>
           </a:solidFill>
           <a:ln w="12700">
             <a:solidFill>
-              <a:srgbClr val="D97706"/>
+              <a:srgbClr val="D98210"/>
             </a:solidFill>
           </a:ln>
         </p:spPr>
@@ -3985,8 +3975,8 @@
         </p:nvSpPr>
         <p:spPr>
           <a:xfrm>
-            <a:off x="1234440" y="2606040"/>
-            <a:ext cx="2880360" cy="1874519"/>
+            <a:off x="1234440" y="2560320"/>
+            <a:ext cx="2880360" cy="1920240"/>
           </a:xfrm>
           <a:prstGeom prst="rect">
             <a:avLst/>
@@ -4005,7 +3995,7 @@
               </a:spcAft>
               <a:defRPr sz="1300" b="1">
                 <a:solidFill>
-                  <a:srgbClr val="D97706"/>
+                  <a:srgbClr val="D98210"/>
                 </a:solidFill>
                 <a:latin typeface="Georgia"/>
               </a:defRPr>
@@ -4016,7 +4006,7 @@
           </a:p>
           <a:p>
             <a:pPr>
-              <a:defRPr sz="1000">
+              <a:defRPr sz="980">
                 <a:solidFill>
                   <a:srgbClr val="FFFFFF"/>
                 </a:solidFill>
@@ -4037,18 +4027,18 @@
         </p:nvSpPr>
         <p:spPr>
           <a:xfrm>
-            <a:off x="4434840" y="2468880"/>
-            <a:ext cx="3154680" cy="2148840"/>
+            <a:off x="4434840" y="2423160"/>
+            <a:ext cx="3154680" cy="2194560"/>
           </a:xfrm>
           <a:prstGeom prst="roundRect">
             <a:avLst/>
           </a:prstGeom>
           <a:solidFill>
-            <a:srgbClr val="085444"/>
+            <a:srgbClr val="0B3D33"/>
           </a:solidFill>
           <a:ln w="12700">
             <a:solidFill>
-              <a:srgbClr val="D97706"/>
+              <a:srgbClr val="D98210"/>
             </a:solidFill>
           </a:ln>
         </p:spPr>
@@ -4082,8 +4072,8 @@
         </p:nvSpPr>
         <p:spPr>
           <a:xfrm>
-            <a:off x="4572000" y="2606040"/>
-            <a:ext cx="2880360" cy="1874519"/>
+            <a:off x="4572000" y="2560320"/>
+            <a:ext cx="2880360" cy="1920240"/>
           </a:xfrm>
           <a:prstGeom prst="rect">
             <a:avLst/>
@@ -4102,7 +4092,7 @@
               </a:spcAft>
               <a:defRPr sz="1300" b="1">
                 <a:solidFill>
-                  <a:srgbClr val="D97706"/>
+                  <a:srgbClr val="D98210"/>
                 </a:solidFill>
                 <a:latin typeface="Georgia"/>
               </a:defRPr>
@@ -4113,7 +4103,7 @@
           </a:p>
           <a:p>
             <a:pPr>
-              <a:defRPr sz="1000">
+              <a:defRPr sz="980">
                 <a:solidFill>
                   <a:srgbClr val="FFFFFF"/>
                 </a:solidFill>
@@ -4134,18 +4124,18 @@
         </p:nvSpPr>
         <p:spPr>
           <a:xfrm>
-            <a:off x="7772400" y="2468880"/>
-            <a:ext cx="3154680" cy="2148840"/>
+            <a:off x="7772400" y="2423160"/>
+            <a:ext cx="3154680" cy="2194560"/>
           </a:xfrm>
           <a:prstGeom prst="roundRect">
             <a:avLst/>
           </a:prstGeom>
           <a:solidFill>
-            <a:srgbClr val="085444"/>
+            <a:srgbClr val="0B3D33"/>
           </a:solidFill>
           <a:ln w="12700">
             <a:solidFill>
-              <a:srgbClr val="D97706"/>
+              <a:srgbClr val="D98210"/>
             </a:solidFill>
           </a:ln>
         </p:spPr>
@@ -4179,8 +4169,8 @@
         </p:nvSpPr>
         <p:spPr>
           <a:xfrm>
-            <a:off x="7909560" y="2606040"/>
-            <a:ext cx="2880360" cy="1874519"/>
+            <a:off x="7909560" y="2560320"/>
+            <a:ext cx="2880360" cy="1920240"/>
           </a:xfrm>
           <a:prstGeom prst="rect">
             <a:avLst/>
@@ -4199,7 +4189,7 @@
               </a:spcAft>
               <a:defRPr sz="1300" b="1">
                 <a:solidFill>
-                  <a:srgbClr val="D97706"/>
+                  <a:srgbClr val="D98210"/>
                 </a:solidFill>
                 <a:latin typeface="Georgia"/>
               </a:defRPr>
@@ -4210,7 +4200,7 @@
           </a:p>
           <a:p>
             <a:pPr>
-              <a:defRPr sz="1000">
+              <a:defRPr sz="980">
                 <a:solidFill>
                   <a:srgbClr val="FFFFFF"/>
                 </a:solidFill>
@@ -4260,7 +4250,7 @@
             <a:pPr algn="ctr">
               <a:defRPr sz="1050">
                 <a:solidFill>
-                  <a:srgbClr val="D97706"/>
+                  <a:srgbClr val="D98210"/>
                 </a:solidFill>
               </a:defRPr>
             </a:pPr>
@@ -4303,7 +4293,7 @@
             <a:avLst/>
           </a:prstGeom>
           <a:solidFill>
-            <a:srgbClr val="FAF8F4"/>
+            <a:srgbClr val="FAF7F2"/>
           </a:solidFill>
           <a:ln>
             <a:noFill/>
@@ -4356,7 +4346,7 @@
             <a:pPr>
               <a:defRPr sz="1050" b="1">
                 <a:solidFill>
-                  <a:srgbClr val="9E4A0C"/>
+                  <a:srgbClr val="A84D0E"/>
                 </a:solidFill>
                 <a:latin typeface="Arial"/>
               </a:defRPr>
@@ -4375,7 +4365,7 @@
         </p:nvSpPr>
         <p:spPr>
           <a:xfrm>
-            <a:off x="731520" y="685800"/>
+            <a:off x="731520" y="676656"/>
             <a:ext cx="10698480" cy="594360"/>
           </a:xfrm>
           <a:prstGeom prst="rect">
@@ -4392,7 +4382,7 @@
             <a:pPr>
               <a:defRPr sz="2300" b="1">
                 <a:solidFill>
-                  <a:srgbClr val="085444"/>
+                  <a:srgbClr val="0B3D33"/>
                 </a:solidFill>
                 <a:latin typeface="Georgia"/>
               </a:defRPr>
@@ -4411,7 +4401,7 @@
         </p:nvSpPr>
         <p:spPr>
           <a:xfrm>
-            <a:off x="731520" y="1261872"/>
+            <a:off x="731520" y="1243584"/>
             <a:ext cx="10698480" cy="365760"/>
           </a:xfrm>
           <a:prstGeom prst="rect">
@@ -4426,9 +4416,9 @@
           <a:lstStyle/>
           <a:p>
             <a:pPr>
-              <a:defRPr sz="1200">
-                <a:solidFill>
-                  <a:srgbClr val="6C7A73"/>
+              <a:defRPr sz="1150">
+                <a:solidFill>
+                  <a:srgbClr val="5F6E67"/>
                 </a:solidFill>
                 <a:latin typeface="Arial"/>
               </a:defRPr>
@@ -4448,7 +4438,99 @@
         <p:spPr>
           <a:xfrm>
             <a:off x="731520" y="1691640"/>
-            <a:ext cx="3429000" cy="4389120"/>
+            <a:ext cx="10728655" cy="685800"/>
+          </a:xfrm>
+          <a:prstGeom prst="roundRect">
+            <a:avLst/>
+          </a:prstGeom>
+          <a:solidFill>
+            <a:srgbClr val="F3EEE6"/>
+          </a:solidFill>
+          <a:ln w="12700">
+            <a:solidFill>
+              <a:srgbClr val="D98210"/>
+            </a:solidFill>
+          </a:ln>
+        </p:spPr>
+        <p:style>
+          <a:lnRef idx="1">
+            <a:schemeClr val="accent1"/>
+          </a:lnRef>
+          <a:fillRef idx="3">
+            <a:schemeClr val="accent1"/>
+          </a:fillRef>
+          <a:effectRef idx="2">
+            <a:schemeClr val="accent1"/>
+          </a:effectRef>
+          <a:fontRef idx="minor">
+            <a:schemeClr val="lt1"/>
+          </a:fontRef>
+        </p:style>
+        <p:txBody>
+          <a:bodyPr rtlCol="0" anchor="ctr"/>
+          <a:lstStyle/>
+          <a:p>
+            <a:pPr algn="ctr"/>
+          </a:p>
+        </p:txBody>
+      </p:sp>
+      <p:sp>
+        <p:nvSpPr>
+          <p:cNvPr id="7" name="TextBox 6"/>
+          <p:cNvSpPr txBox="1"/>
+          <p:nvPr/>
+        </p:nvSpPr>
+        <p:spPr>
+          <a:xfrm>
+            <a:off x="868680" y="1737360"/>
+            <a:ext cx="10424160" cy="594360"/>
+          </a:xfrm>
+          <a:prstGeom prst="rect">
+            <a:avLst/>
+          </a:prstGeom>
+          <a:noFill/>
+        </p:spPr>
+        <p:txBody>
+          <a:bodyPr wrap="square">
+            <a:spAutoFit/>
+          </a:bodyPr>
+          <a:lstStyle/>
+          <a:p>
+            <a:pPr>
+              <a:defRPr sz="1100" b="1">
+                <a:solidFill>
+                  <a:srgbClr val="0B3D33"/>
+                </a:solidFill>
+              </a:defRPr>
+            </a:pPr>
+            <a:r>
+              <a:t>THE CORE DILEMMA: Jammu is treated as a high-friction railway transfer point rather than a cultural destination.</a:t>
+            </a:r>
+          </a:p>
+          <a:p>
+            <a:pPr>
+              <a:defRPr sz="950">
+                <a:solidFill>
+                  <a:srgbClr val="5F6E67"/>
+                </a:solidFill>
+              </a:defRPr>
+            </a:pPr>
+            <a:r>
+              <a:t>Over 10 Million yatris enter annually, yet fear of missing departures keeps them trapped on waiting platforms without guidance.</a:t>
+            </a:r>
+          </a:p>
+        </p:txBody>
+      </p:sp>
+      <p:sp>
+        <p:nvSpPr>
+          <p:cNvPr id="8" name="Rounded Rectangle 7"/>
+          <p:cNvSpPr/>
+          <p:nvPr/>
+        </p:nvSpPr>
+        <p:spPr>
+          <a:xfrm>
+            <a:off x="731520" y="2514600"/>
+            <a:ext cx="3504895" cy="3703320"/>
           </a:xfrm>
           <a:prstGeom prst="roundRect">
             <a:avLst/>
@@ -4458,7 +4540,7 @@
           </a:solidFill>
           <a:ln w="12700">
             <a:solidFill>
-              <a:srgbClr val="E6DED4"/>
+              <a:srgbClr val="E4DCD2"/>
             </a:solidFill>
           </a:ln>
         </p:spPr>
@@ -4486,14 +4568,14 @@
       </p:sp>
       <p:sp>
         <p:nvSpPr>
-          <p:cNvPr id="7" name="TextBox 6"/>
+          <p:cNvPr id="9" name="TextBox 8"/>
           <p:cNvSpPr txBox="1"/>
           <p:nvPr/>
         </p:nvSpPr>
         <p:spPr>
           <a:xfrm>
-            <a:off x="914400" y="1828800"/>
-            <a:ext cx="3063240" cy="4114800"/>
+            <a:off x="896112" y="2651760"/>
+            <a:ext cx="3172968" cy="3429000"/>
           </a:xfrm>
           <a:prstGeom prst="rect">
             <a:avLst/>
@@ -4507,30 +4589,15 @@
           <a:lstStyle/>
           <a:p>
             <a:pPr>
-              <a:defRPr sz="1400" b="1">
-                <a:solidFill>
-                  <a:srgbClr val="9E4A0C"/>
+              <a:defRPr sz="1350" b="1">
+                <a:solidFill>
+                  <a:srgbClr val="A84D0E"/>
                 </a:solidFill>
                 <a:latin typeface="Georgia"/>
               </a:defRPr>
             </a:pPr>
             <a:r>
-              <a:t>🚨 Transit Anxiety &amp; Time Fear</a:t>
-            </a:r>
-          </a:p>
-          <a:p>
-            <a:pPr>
-              <a:spcAft>
-                <a:spcPts val="1000"/>
-              </a:spcAft>
-              <a:defRPr sz="1100" b="1">
-                <a:solidFill>
-                  <a:srgbClr val="1A2420"/>
-                </a:solidFill>
-              </a:defRPr>
-            </a:pPr>
-            <a:r>
-              <a:t>Fear of Missing Onward Trains / Flights</a:t>
+              <a:t>🚨 01. The Transit Panic</a:t>
             </a:r>
           </a:p>
           <a:p>
@@ -4538,9 +4605,24 @@
               <a:spcAft>
                 <a:spcPts val="800"/>
               </a:spcAft>
-              <a:defRPr sz="1050">
-                <a:solidFill>
-                  <a:srgbClr val="6C7A73"/>
+              <a:defRPr sz="1050" b="1">
+                <a:solidFill>
+                  <a:srgbClr val="18221E"/>
+                </a:solidFill>
+              </a:defRPr>
+            </a:pPr>
+            <a:r>
+              <a:t>Fear of Missing Onward Trains / Flights</a:t>
+            </a:r>
+          </a:p>
+          <a:p>
+            <a:pPr>
+              <a:spcAft>
+                <a:spcPts val="500"/>
+              </a:spcAft>
+              <a:defRPr sz="950">
+                <a:solidFill>
+                  <a:srgbClr val="5F6E67"/>
                 </a:solidFill>
               </a:defRPr>
             </a:pPr>
@@ -4551,11 +4633,11 @@
           <a:p>
             <a:pPr>
               <a:spcAft>
-                <a:spcPts val="800"/>
+                <a:spcPts val="500"/>
               </a:spcAft>
-              <a:defRPr sz="1050">
-                <a:solidFill>
-                  <a:srgbClr val="6C7A73"/>
+              <a:defRPr sz="950">
+                <a:solidFill>
+                  <a:srgbClr val="5F6E67"/>
                 </a:solidFill>
               </a:defRPr>
             </a:pPr>
@@ -4566,11 +4648,11 @@
           <a:p>
             <a:pPr>
               <a:spcAft>
-                <a:spcPts val="800"/>
+                <a:spcPts val="500"/>
               </a:spcAft>
-              <a:defRPr sz="1050">
-                <a:solidFill>
-                  <a:srgbClr val="6C7A73"/>
+              <a:defRPr sz="950">
+                <a:solidFill>
+                  <a:srgbClr val="5F6E67"/>
                 </a:solidFill>
               </a:defRPr>
             </a:pPr>
@@ -4578,18 +4660,33 @@
               <a:t>•  Zero existing tools compute guaranteed conservative safety return buffers.</a:t>
             </a:r>
           </a:p>
-        </p:txBody>
-      </p:sp>
-      <p:sp>
-        <p:nvSpPr>
-          <p:cNvPr id="8" name="Rounded Rectangle 7"/>
+          <a:p>
+            <a:pPr>
+              <a:spcAft>
+                <a:spcPts val="500"/>
+              </a:spcAft>
+              <a:defRPr sz="950">
+                <a:solidFill>
+                  <a:srgbClr val="5F6E67"/>
+                </a:solidFill>
+              </a:defRPr>
+            </a:pPr>
+            <a:r>
+              <a:t>•  Result: Over 85% of visitors never step outside the station compound.</a:t>
+            </a:r>
+          </a:p>
+        </p:txBody>
+      </p:sp>
+      <p:sp>
+        <p:nvSpPr>
+          <p:cNvPr id="10" name="Rounded Rectangle 9"/>
           <p:cNvSpPr/>
           <p:nvPr/>
         </p:nvSpPr>
         <p:spPr>
           <a:xfrm>
-            <a:off x="4343400" y="1691640"/>
-            <a:ext cx="3429000" cy="4389120"/>
+            <a:off x="4343400" y="2514600"/>
+            <a:ext cx="3504895" cy="3703320"/>
           </a:xfrm>
           <a:prstGeom prst="roundRect">
             <a:avLst/>
@@ -4599,7 +4696,7 @@
           </a:solidFill>
           <a:ln w="12700">
             <a:solidFill>
-              <a:srgbClr val="E6DED4"/>
+              <a:srgbClr val="E4DCD2"/>
             </a:solidFill>
           </a:ln>
         </p:spPr>
@@ -4627,14 +4724,14 @@
       </p:sp>
       <p:sp>
         <p:nvSpPr>
-          <p:cNvPr id="9" name="TextBox 8"/>
+          <p:cNvPr id="11" name="TextBox 10"/>
           <p:cNvSpPr txBox="1"/>
           <p:nvPr/>
         </p:nvSpPr>
         <p:spPr>
           <a:xfrm>
-            <a:off x="4526280" y="1828800"/>
-            <a:ext cx="3063240" cy="4114800"/>
+            <a:off x="4507992" y="2651760"/>
+            <a:ext cx="3172968" cy="3429000"/>
           </a:xfrm>
           <a:prstGeom prst="rect">
             <a:avLst/>
@@ -4648,30 +4745,15 @@
           <a:lstStyle/>
           <a:p>
             <a:pPr>
-              <a:defRPr sz="1400" b="1">
-                <a:solidFill>
-                  <a:srgbClr val="9E4A0C"/>
+              <a:defRPr sz="1350" b="1">
+                <a:solidFill>
+                  <a:srgbClr val="A84D0E"/>
                 </a:solidFill>
                 <a:latin typeface="Georgia"/>
               </a:defRPr>
             </a:pPr>
             <a:r>
-              <a:t>💸 Transport Gouging &amp; Haggling</a:t>
-            </a:r>
-          </a:p>
-          <a:p>
-            <a:pPr>
-              <a:spcAft>
-                <a:spcPts val="1000"/>
-              </a:spcAft>
-              <a:defRPr sz="1100" b="1">
-                <a:solidFill>
-                  <a:srgbClr val="1A2420"/>
-                </a:solidFill>
-              </a:defRPr>
-            </a:pPr>
-            <a:r>
-              <a:t>Unregulated Fares &amp; Commuter Harassment</a:t>
+              <a:t>💸 02. The ₹1,200 Haggling Tax</a:t>
             </a:r>
           </a:p>
           <a:p>
@@ -4679,9 +4761,24 @@
               <a:spcAft>
                 <a:spcPts val="800"/>
               </a:spcAft>
-              <a:defRPr sz="1050">
-                <a:solidFill>
-                  <a:srgbClr val="6C7A73"/>
+              <a:defRPr sz="1050" b="1">
+                <a:solidFill>
+                  <a:srgbClr val="18221E"/>
+                </a:solidFill>
+              </a:defRPr>
+            </a:pPr>
+            <a:r>
+              <a:t>Unregulated Fares &amp; Commuter Harassment</a:t>
+            </a:r>
+          </a:p>
+          <a:p>
+            <a:pPr>
+              <a:spcAft>
+                <a:spcPts val="500"/>
+              </a:spcAft>
+              <a:defRPr sz="950">
+                <a:solidFill>
+                  <a:srgbClr val="5F6E67"/>
                 </a:solidFill>
               </a:defRPr>
             </a:pPr>
@@ -4692,11 +4789,11 @@
           <a:p>
             <a:pPr>
               <a:spcAft>
-                <a:spcPts val="800"/>
+                <a:spcPts val="500"/>
               </a:spcAft>
-              <a:defRPr sz="1050">
-                <a:solidFill>
-                  <a:srgbClr val="6C7A73"/>
+              <a:defRPr sz="950">
+                <a:solidFill>
+                  <a:srgbClr val="5F6E67"/>
                 </a:solidFill>
               </a:defRPr>
             </a:pPr>
@@ -4707,11 +4804,11 @@
           <a:p>
             <a:pPr>
               <a:spcAft>
-                <a:spcPts val="800"/>
+                <a:spcPts val="500"/>
               </a:spcAft>
-              <a:defRPr sz="1050">
-                <a:solidFill>
-                  <a:srgbClr val="6C7A73"/>
+              <a:defRPr sz="950">
+                <a:solidFill>
+                  <a:srgbClr val="5F6E67"/>
                 </a:solidFill>
               </a:defRPr>
             </a:pPr>
@@ -4719,18 +4816,33 @@
               <a:t>•  Zero visibility into official prepaid auto/taxi union rate cards.</a:t>
             </a:r>
           </a:p>
-        </p:txBody>
-      </p:sp>
-      <p:sp>
-        <p:nvSpPr>
-          <p:cNvPr id="10" name="Rounded Rectangle 9"/>
+          <a:p>
+            <a:pPr>
+              <a:spcAft>
+                <a:spcPts val="500"/>
+              </a:spcAft>
+              <a:defRPr sz="950">
+                <a:solidFill>
+                  <a:srgbClr val="5F6E67"/>
+                </a:solidFill>
+              </a:defRPr>
+            </a:pPr>
+            <a:r>
+              <a:t>•  Result: Tourists feel exploited within their first hour in Jammu.</a:t>
+            </a:r>
+          </a:p>
+        </p:txBody>
+      </p:sp>
+      <p:sp>
+        <p:nvSpPr>
+          <p:cNvPr id="12" name="Rounded Rectangle 11"/>
           <p:cNvSpPr/>
           <p:nvPr/>
         </p:nvSpPr>
         <p:spPr>
           <a:xfrm>
-            <a:off x="7955280" y="1691640"/>
-            <a:ext cx="3429000" cy="4389120"/>
+            <a:off x="7955280" y="2514600"/>
+            <a:ext cx="3504895" cy="3703320"/>
           </a:xfrm>
           <a:prstGeom prst="roundRect">
             <a:avLst/>
@@ -4740,7 +4852,7 @@
           </a:solidFill>
           <a:ln w="12700">
             <a:solidFill>
-              <a:srgbClr val="E6DED4"/>
+              <a:srgbClr val="E4DCD2"/>
             </a:solidFill>
           </a:ln>
         </p:spPr>
@@ -4768,14 +4880,14 @@
       </p:sp>
       <p:sp>
         <p:nvSpPr>
-          <p:cNvPr id="11" name="TextBox 10"/>
+          <p:cNvPr id="13" name="TextBox 12"/>
           <p:cNvSpPr txBox="1"/>
           <p:nvPr/>
         </p:nvSpPr>
         <p:spPr>
           <a:xfrm>
-            <a:off x="8138160" y="1828800"/>
-            <a:ext cx="3063240" cy="4114800"/>
+            <a:off x="8119872" y="2651760"/>
+            <a:ext cx="3172968" cy="3429000"/>
           </a:xfrm>
           <a:prstGeom prst="rect">
             <a:avLst/>
@@ -4789,30 +4901,15 @@
           <a:lstStyle/>
           <a:p>
             <a:pPr>
-              <a:defRPr sz="1400" b="1">
-                <a:solidFill>
-                  <a:srgbClr val="9E4A0C"/>
+              <a:defRPr sz="1350" b="1">
+                <a:solidFill>
+                  <a:srgbClr val="A84D0E"/>
                 </a:solidFill>
                 <a:latin typeface="Georgia"/>
               </a:defRPr>
             </a:pPr>
             <a:r>
-              <a:t>📴 Cellular Blackouts &amp; Accessibility</a:t>
-            </a:r>
-          </a:p>
-          <a:p>
-            <a:pPr>
-              <a:spcAft>
-                <a:spcPts val="1000"/>
-              </a:spcAft>
-              <a:defRPr sz="1100" b="1">
-                <a:solidFill>
-                  <a:srgbClr val="1A2420"/>
-                </a:solidFill>
-              </a:defRPr>
-            </a:pPr>
-            <a:r>
-              <a:t>Mountain Dead Zones &amp; Elder Strain</a:t>
+              <a:t>📴 03. The Mountain Blackout</a:t>
             </a:r>
           </a:p>
           <a:p>
@@ -4820,9 +4917,24 @@
               <a:spcAft>
                 <a:spcPts val="800"/>
               </a:spcAft>
-              <a:defRPr sz="1050">
-                <a:solidFill>
-                  <a:srgbClr val="6C7A73"/>
+              <a:defRPr sz="1050" b="1">
+                <a:solidFill>
+                  <a:srgbClr val="18221E"/>
+                </a:solidFill>
+              </a:defRPr>
+            </a:pPr>
+            <a:r>
+              <a:t>Cellular Dead Zones &amp; Elder Strain</a:t>
+            </a:r>
+          </a:p>
+          <a:p>
+            <a:pPr>
+              <a:spcAft>
+                <a:spcPts val="500"/>
+              </a:spcAft>
+              <a:defRPr sz="950">
+                <a:solidFill>
+                  <a:srgbClr val="5F6E67"/>
                 </a:solidFill>
               </a:defRPr>
             </a:pPr>
@@ -4833,11 +4945,11 @@
           <a:p>
             <a:pPr>
               <a:spcAft>
-                <a:spcPts val="800"/>
+                <a:spcPts val="500"/>
               </a:spcAft>
-              <a:defRPr sz="1050">
-                <a:solidFill>
-                  <a:srgbClr val="6C7A73"/>
+              <a:defRPr sz="950">
+                <a:solidFill>
+                  <a:srgbClr val="5F6E67"/>
                 </a:solidFill>
               </a:defRPr>
             </a:pPr>
@@ -4848,11 +4960,11 @@
           <a:p>
             <a:pPr>
               <a:spcAft>
-                <a:spcPts val="800"/>
+                <a:spcPts val="500"/>
               </a:spcAft>
-              <a:defRPr sz="1050">
-                <a:solidFill>
-                  <a:srgbClr val="6C7A73"/>
+              <a:defRPr sz="950">
+                <a:solidFill>
+                  <a:srgbClr val="5F6E67"/>
                 </a:solidFill>
               </a:defRPr>
             </a:pPr>
@@ -4860,11 +4972,26 @@
               <a:t>•  Emergency hotlines and National ERSS 112 are scattered across fragmented websites.</a:t>
             </a:r>
           </a:p>
-        </p:txBody>
-      </p:sp>
-      <p:sp>
-        <p:nvSpPr>
-          <p:cNvPr id="12" name="TextBox 11"/>
+          <a:p>
+            <a:pPr>
+              <a:spcAft>
+                <a:spcPts val="500"/>
+              </a:spcAft>
+              <a:defRPr sz="950">
+                <a:solidFill>
+                  <a:srgbClr val="5F6E67"/>
+                </a:solidFill>
+              </a:defRPr>
+            </a:pPr>
+            <a:r>
+              <a:t>•  Result: Families with elders experience high physical and mental stress.</a:t>
+            </a:r>
+          </a:p>
+        </p:txBody>
+      </p:sp>
+      <p:sp>
+        <p:nvSpPr>
+          <p:cNvPr id="14" name="TextBox 13"/>
           <p:cNvSpPr txBox="1"/>
           <p:nvPr/>
         </p:nvSpPr>
@@ -4887,7 +5014,7 @@
             <a:pPr>
               <a:defRPr sz="900">
                 <a:solidFill>
-                  <a:srgbClr val="6C7A73"/>
+                  <a:srgbClr val="5F6E67"/>
                 </a:solidFill>
                 <a:latin typeface="Arial"/>
               </a:defRPr>
@@ -4931,7 +5058,7 @@
             <a:avLst/>
           </a:prstGeom>
           <a:solidFill>
-            <a:srgbClr val="FAF8F4"/>
+            <a:srgbClr val="FAF7F2"/>
           </a:solidFill>
           <a:ln>
             <a:noFill/>
@@ -4984,7 +5111,7 @@
             <a:pPr>
               <a:defRPr sz="1050" b="1">
                 <a:solidFill>
-                  <a:srgbClr val="9E4A0C"/>
+                  <a:srgbClr val="A84D0E"/>
                 </a:solidFill>
                 <a:latin typeface="Arial"/>
               </a:defRPr>
@@ -5003,7 +5130,7 @@
         </p:nvSpPr>
         <p:spPr>
           <a:xfrm>
-            <a:off x="731520" y="685800"/>
+            <a:off x="731520" y="676656"/>
             <a:ext cx="10698480" cy="594360"/>
           </a:xfrm>
           <a:prstGeom prst="rect">
@@ -5020,7 +5147,7 @@
             <a:pPr>
               <a:defRPr sz="2300" b="1">
                 <a:solidFill>
-                  <a:srgbClr val="085444"/>
+                  <a:srgbClr val="0B3D33"/>
                 </a:solidFill>
                 <a:latin typeface="Georgia"/>
               </a:defRPr>
@@ -5039,7 +5166,7 @@
         </p:nvSpPr>
         <p:spPr>
           <a:xfrm>
-            <a:off x="731520" y="1261872"/>
+            <a:off x="731520" y="1243584"/>
             <a:ext cx="10698480" cy="365760"/>
           </a:xfrm>
           <a:prstGeom prst="rect">
@@ -5054,9 +5181,9 @@
           <a:lstStyle/>
           <a:p>
             <a:pPr>
-              <a:defRPr sz="1200">
-                <a:solidFill>
-                  <a:srgbClr val="6C7A73"/>
+              <a:defRPr sz="1150">
+                <a:solidFill>
+                  <a:srgbClr val="5F6E67"/>
                 </a:solidFill>
                 <a:latin typeface="Arial"/>
               </a:defRPr>
@@ -5076,17 +5203,17 @@
         <p:spPr>
           <a:xfrm>
             <a:off x="731520" y="1691640"/>
-            <a:ext cx="4114800" cy="4389120"/>
+            <a:ext cx="4114800" cy="4480560"/>
           </a:xfrm>
           <a:prstGeom prst="roundRect">
             <a:avLst/>
           </a:prstGeom>
           <a:solidFill>
-            <a:srgbClr val="085444"/>
+            <a:srgbClr val="0B3D33"/>
           </a:solidFill>
           <a:ln w="12700">
             <a:solidFill>
-              <a:srgbClr val="E6DED4"/>
+              <a:srgbClr val="E4DCD2"/>
             </a:solidFill>
           </a:ln>
         </p:spPr>
@@ -5121,7 +5248,7 @@
         <p:spPr>
           <a:xfrm>
             <a:off x="914400" y="1874519"/>
-            <a:ext cx="3749039" cy="4023360"/>
+            <a:ext cx="3749039" cy="4114800"/>
           </a:xfrm>
           <a:prstGeom prst="rect">
             <a:avLst/>
@@ -5135,9 +5262,9 @@
           <a:lstStyle/>
           <a:p>
             <a:pPr>
-              <a:defRPr sz="3800" b="1">
-                <a:solidFill>
-                  <a:srgbClr val="D97706"/>
+              <a:defRPr sz="4000" b="1">
+                <a:solidFill>
+                  <a:srgbClr val="D98210"/>
                 </a:solidFill>
                 <a:latin typeface="Georgia"/>
               </a:defRPr>
@@ -5151,7 +5278,7 @@
               <a:spcAft>
                 <a:spcPts val="1800"/>
               </a:spcAft>
-              <a:defRPr sz="1250">
+              <a:defRPr sz="1200">
                 <a:solidFill>
                   <a:srgbClr val="FFFFFF"/>
                 </a:solidFill>
@@ -5163,27 +5290,55 @@
           </a:p>
           <a:p>
             <a:pPr>
-              <a:defRPr sz="1700" b="1">
-                <a:solidFill>
-                  <a:srgbClr val="D97706"/>
+              <a:defRPr sz="3200" b="1">
+                <a:solidFill>
+                  <a:srgbClr val="D98210"/>
                 </a:solidFill>
                 <a:latin typeface="Georgia"/>
               </a:defRPr>
             </a:pPr>
             <a:r>
-              <a:t>&lt; 2 Hours Average Dwell</a:t>
-            </a:r>
-          </a:p>
-          <a:p>
-            <a:pPr>
-              <a:defRPr sz="1200">
+              <a:t>&lt; 2 Hours</a:t>
+            </a:r>
+          </a:p>
+          <a:p>
+            <a:pPr>
+              <a:spcAft>
+                <a:spcPts val="1600"/>
+              </a:spcAft>
+              <a:defRPr sz="1150">
                 <a:solidFill>
                   <a:srgbClr val="FFFFFF"/>
                 </a:solidFill>
               </a:defRPr>
             </a:pPr>
             <a:r>
-              <a:t>Over 85% of yatris treat Jammu as a mere train-to-bus transit hallway, unaware of rich Dogra heritage minutes away.</a:t>
+              <a:t>Average transit dwell in Jammu City. Over 85% of yatris treat Jammu as a mere train-to-bus transit hallway.</a:t>
+            </a:r>
+          </a:p>
+          <a:p>
+            <a:pPr>
+              <a:defRPr sz="2800" b="1">
+                <a:solidFill>
+                  <a:srgbClr val="D98210"/>
+                </a:solidFill>
+                <a:latin typeface="Georgia"/>
+              </a:defRPr>
+            </a:pPr>
+            <a:r>
+              <a:t>₹300+ Crores</a:t>
+            </a:r>
+          </a:p>
+          <a:p>
+            <a:pPr>
+              <a:defRPr sz="1100">
+                <a:solidFill>
+                  <a:srgbClr val="FFFFFF"/>
+                </a:solidFill>
+              </a:defRPr>
+            </a:pPr>
+            <a:r>
+              <a:t>Estimated annual municipal revenue lost in local hospitality, authentic craft, and cultural transit.</a:t>
             </a:r>
           </a:p>
         </p:txBody>
@@ -5197,7 +5352,7 @@
         <p:spPr>
           <a:xfrm>
             <a:off x="5120640" y="1691640"/>
-            <a:ext cx="6309360" cy="4389120"/>
+            <a:ext cx="6339535" cy="4480560"/>
           </a:xfrm>
           <a:prstGeom prst="roundRect">
             <a:avLst/>
@@ -5207,7 +5362,7 @@
           </a:solidFill>
           <a:ln w="12700">
             <a:solidFill>
-              <a:srgbClr val="E6DED4"/>
+              <a:srgbClr val="E4DCD2"/>
             </a:solidFill>
           </a:ln>
         </p:spPr>
@@ -5242,7 +5397,7 @@
         <p:spPr>
           <a:xfrm>
             <a:off x="5303520" y="1874519"/>
-            <a:ext cx="5943600" cy="4023360"/>
+            <a:ext cx="5943600" cy="4114800"/>
           </a:xfrm>
           <a:prstGeom prst="rect">
             <a:avLst/>
@@ -5257,24 +5412,24 @@
           <a:p>
             <a:pPr>
               <a:spcAft>
-                <a:spcPts val="1200"/>
+                <a:spcPts val="1000"/>
               </a:spcAft>
               <a:defRPr sz="1700" b="1">
                 <a:solidFill>
-                  <a:srgbClr val="085444"/>
+                  <a:srgbClr val="0B3D33"/>
                 </a:solidFill>
                 <a:latin typeface="Georgia"/>
               </a:defRPr>
             </a:pPr>
             <a:r>
-              <a:t>Four Costly Tourism &amp; Economic Gaps</a:t>
-            </a:r>
-          </a:p>
-          <a:p>
-            <a:pPr>
-              <a:defRPr sz="1200" b="1">
-                <a:solidFill>
-                  <a:srgbClr val="9E4A0C"/>
+              <a:t>Where the Visitor Value Is Lost</a:t>
+            </a:r>
+          </a:p>
+          <a:p>
+            <a:pPr>
+              <a:defRPr sz="1150" b="1">
+                <a:solidFill>
+                  <a:srgbClr val="A84D0E"/>
                 </a:solidFill>
               </a:defRPr>
             </a:pPr>
@@ -5287,21 +5442,21 @@
               <a:spcAft>
                 <a:spcPts val="600"/>
               </a:spcAft>
-              <a:defRPr sz="1050">
-                <a:solidFill>
-                  <a:srgbClr val="6C7A73"/>
-                </a:solidFill>
-              </a:defRPr>
-            </a:pPr>
-            <a:r>
-              <a:t>Mubarak Mandi Palace (Dogra royal seat), Bahu Fort (3000 yrs), and Amar Mahal witness only a tiny fraction of their visitor potential.</a:t>
-            </a:r>
-          </a:p>
-          <a:p>
-            <a:pPr>
-              <a:defRPr sz="1200" b="1">
-                <a:solidFill>
-                  <a:srgbClr val="9E4A0C"/>
+              <a:defRPr sz="1000">
+                <a:solidFill>
+                  <a:srgbClr val="5F6E67"/>
+                </a:solidFill>
+              </a:defRPr>
+            </a:pPr>
+            <a:r>
+              <a:t>Mubarak Mandi Palace (seat of Dogra dynasty), Bahu Fort (3000-yr landmark), and Amar Mahal witness &lt;5% of pilgrim footfall due to missing structured half-day circuits.</a:t>
+            </a:r>
+          </a:p>
+          <a:p>
+            <a:pPr>
+              <a:defRPr sz="1150" b="1">
+                <a:solidFill>
+                  <a:srgbClr val="A84D0E"/>
                 </a:solidFill>
               </a:defRPr>
             </a:pPr>
@@ -5314,21 +5469,21 @@
               <a:spcAft>
                 <a:spcPts val="600"/>
               </a:spcAft>
-              <a:defRPr sz="1050">
-                <a:solidFill>
-                  <a:srgbClr val="6C7A73"/>
-                </a:solidFill>
-              </a:defRPr>
-            </a:pPr>
-            <a:r>
-              <a:t>Authentic Dogra crafts (Basohli Paintings, Pashmina, Basohli Tweed, Bhaderwah Rajmash) lose sales to roadside highway fakes with no verified directory.</a:t>
-            </a:r>
-          </a:p>
-          <a:p>
-            <a:pPr>
-              <a:defRPr sz="1200" b="1">
-                <a:solidFill>
-                  <a:srgbClr val="9E4A0C"/>
+              <a:defRPr sz="1000">
+                <a:solidFill>
+                  <a:srgbClr val="5F6E67"/>
+                </a:solidFill>
+              </a:defRPr>
+            </a:pPr>
+            <a:r>
+              <a:t>Authentic Dogra crafts (Basohli Paintings, Pashmina, Basohli Tweed, Bhaderwah Rajmash) lose sales to roadside counterfeit stalls because visitors lack a verified artisan directory.</a:t>
+            </a:r>
+          </a:p>
+          <a:p>
+            <a:pPr>
+              <a:defRPr sz="1150" b="1">
+                <a:solidFill>
+                  <a:srgbClr val="A84D0E"/>
                 </a:solidFill>
               </a:defRPr>
             </a:pPr>
@@ -5341,26 +5496,26 @@
               <a:spcAft>
                 <a:spcPts val="600"/>
               </a:spcAft>
-              <a:defRPr sz="1050">
-                <a:solidFill>
-                  <a:srgbClr val="6C7A73"/>
-                </a:solidFill>
-              </a:defRPr>
-            </a:pPr>
-            <a:r>
-              <a:t>Indigenous nutritious Dogra delicacies (Kaladi Kulcha, Dogra Dham, Sund Panjeeri) lose out to generic highway fast-food stalls.</a:t>
-            </a:r>
-          </a:p>
-          <a:p>
-            <a:pPr>
-              <a:defRPr sz="1200" b="1">
-                <a:solidFill>
-                  <a:srgbClr val="9E4A0C"/>
-                </a:solidFill>
-              </a:defRPr>
-            </a:pPr>
-            <a:r>
-              <a:t>📉 Lost Municipal Revenue</a:t>
+              <a:defRPr sz="1000">
+                <a:solidFill>
+                  <a:srgbClr val="5F6E67"/>
+                </a:solidFill>
+              </a:defRPr>
+            </a:pPr>
+            <a:r>
+              <a:t>Indigenous nutritious Dogra delicacies (Kaladi Kulcha, Dogra Dham, Sund Panjeeri) lose out to generic highway fast food due to lack of hygienic, verified food trails.</a:t>
+            </a:r>
+          </a:p>
+          <a:p>
+            <a:pPr>
+              <a:defRPr sz="1150" b="1">
+                <a:solidFill>
+                  <a:srgbClr val="A84D0E"/>
+                </a:solidFill>
+              </a:defRPr>
+            </a:pPr>
+            <a:r>
+              <a:t>📉 Transit Inefficiency</a:t>
             </a:r>
           </a:p>
           <a:p>
@@ -5368,14 +5523,14 @@
               <a:spcAft>
                 <a:spcPts val="600"/>
               </a:spcAft>
-              <a:defRPr sz="1050">
-                <a:solidFill>
-                  <a:srgbClr val="6C7A73"/>
-                </a:solidFill>
-              </a:defRPr>
-            </a:pPr>
-            <a:r>
-              <a:t>Estimates show Jammu City loses over ₹300 Crores annually in potential local hospitality, craft, and transportation income.</a:t>
+              <a:defRPr sz="1000">
+                <a:solidFill>
+                  <a:srgbClr val="5F6E67"/>
+                </a:solidFill>
+              </a:defRPr>
+            </a:pPr>
+            <a:r>
+              <a:t>Public Matador mini-buses and E-buses run with irregular passenger loads while private touts crowd station gates, driving congestion and commuter dissatisfaction.</a:t>
             </a:r>
           </a:p>
         </p:txBody>
@@ -5405,7 +5560,7 @@
             <a:pPr>
               <a:defRPr sz="900">
                 <a:solidFill>
-                  <a:srgbClr val="6C7A73"/>
+                  <a:srgbClr val="5F6E67"/>
                 </a:solidFill>
                 <a:latin typeface="Arial"/>
               </a:defRPr>
@@ -5449,7 +5604,7 @@
             <a:avLst/>
           </a:prstGeom>
           <a:solidFill>
-            <a:srgbClr val="FAF8F4"/>
+            <a:srgbClr val="FAF7F2"/>
           </a:solidFill>
           <a:ln>
             <a:noFill/>
@@ -5502,7 +5657,7 @@
             <a:pPr>
               <a:defRPr sz="1050" b="1">
                 <a:solidFill>
-                  <a:srgbClr val="9E4A0C"/>
+                  <a:srgbClr val="A84D0E"/>
                 </a:solidFill>
                 <a:latin typeface="Arial"/>
               </a:defRPr>
@@ -5521,7 +5676,7 @@
         </p:nvSpPr>
         <p:spPr>
           <a:xfrm>
-            <a:off x="731520" y="685800"/>
+            <a:off x="731520" y="676656"/>
             <a:ext cx="10698480" cy="594360"/>
           </a:xfrm>
           <a:prstGeom prst="rect">
@@ -5538,7 +5693,7 @@
             <a:pPr>
               <a:defRPr sz="2300" b="1">
                 <a:solidFill>
-                  <a:srgbClr val="085444"/>
+                  <a:srgbClr val="0B3D33"/>
                 </a:solidFill>
                 <a:latin typeface="Georgia"/>
               </a:defRPr>
@@ -5557,7 +5712,7 @@
         </p:nvSpPr>
         <p:spPr>
           <a:xfrm>
-            <a:off x="731520" y="1261872"/>
+            <a:off x="731520" y="1243584"/>
             <a:ext cx="10698480" cy="365760"/>
           </a:xfrm>
           <a:prstGeom prst="rect">
@@ -5572,9 +5727,9 @@
           <a:lstStyle/>
           <a:p>
             <a:pPr>
-              <a:defRPr sz="1200">
-                <a:solidFill>
-                  <a:srgbClr val="6C7A73"/>
+              <a:defRPr sz="1150">
+                <a:solidFill>
+                  <a:srgbClr val="5F6E67"/>
                 </a:solidFill>
                 <a:latin typeface="Arial"/>
               </a:defRPr>
@@ -5594,7 +5749,7 @@
         <p:spPr>
           <a:xfrm>
             <a:off x="731520" y="1691640"/>
-            <a:ext cx="3931920" cy="2103120"/>
+            <a:ext cx="3931920" cy="2148840"/>
           </a:xfrm>
           <a:prstGeom prst="roundRect">
             <a:avLst/>
@@ -5604,7 +5759,7 @@
           </a:solidFill>
           <a:ln w="12700">
             <a:solidFill>
-              <a:srgbClr val="E6DED4"/>
+              <a:srgbClr val="E4DCD2"/>
             </a:solidFill>
           </a:ln>
         </p:spPr>
@@ -5639,7 +5794,7 @@
         <p:spPr>
           <a:xfrm>
             <a:off x="868680" y="1856232"/>
-            <a:ext cx="3657600" cy="1783080"/>
+            <a:ext cx="3657600" cy="1828800"/>
           </a:xfrm>
           <a:prstGeom prst="rect">
             <a:avLst/>
@@ -5656,9 +5811,9 @@
               <a:spcAft>
                 <a:spcPts val="400"/>
               </a:spcAft>
-              <a:defRPr sz="1400" b="1">
-                <a:solidFill>
-                  <a:srgbClr val="085444"/>
+              <a:defRPr sz="1350" b="1">
+                <a:solidFill>
+                  <a:srgbClr val="0B3D33"/>
                 </a:solidFill>
                 <a:latin typeface="Georgia"/>
               </a:defRPr>
@@ -5669,14 +5824,14 @@
           </a:p>
           <a:p>
             <a:pPr>
-              <a:defRPr sz="1050">
-                <a:solidFill>
-                  <a:srgbClr val="6C7A73"/>
-                </a:solidFill>
-              </a:defRPr>
-            </a:pPr>
-            <a:r>
-              <a:t>Deterministic layout generator tailored to traveler's exact layover window (4h Express, 8h Cultural, 24h Valley trail). Enforces a strict 45-min rail buffer &amp; 150-min air buffer, eliminating missed departures.</a:t>
+              <a:defRPr sz="1000">
+                <a:solidFill>
+                  <a:srgbClr val="5F6E67"/>
+                </a:solidFill>
+              </a:defRPr>
+            </a:pPr>
+            <a:r>
+              <a:t>Deterministic layover itinerary engine tailored to traveler's exact departure deadline (4h Express, 8h Cultural, 24h Valley trail). Enforces a strict 45-min rail buffer &amp; 150-min air buffer, eliminating missed departures.</a:t>
             </a:r>
           </a:p>
         </p:txBody>
@@ -5689,8 +5844,8 @@
         </p:nvSpPr>
         <p:spPr>
           <a:xfrm>
-            <a:off x="731520" y="3931920"/>
-            <a:ext cx="3931920" cy="2103120"/>
+            <a:off x="731520" y="3977639"/>
+            <a:ext cx="3931920" cy="2148840"/>
           </a:xfrm>
           <a:prstGeom prst="roundRect">
             <a:avLst/>
@@ -5700,7 +5855,7 @@
           </a:solidFill>
           <a:ln w="12700">
             <a:solidFill>
-              <a:srgbClr val="E6DED4"/>
+              <a:srgbClr val="E4DCD2"/>
             </a:solidFill>
           </a:ln>
         </p:spPr>
@@ -5734,8 +5889,8 @@
         </p:nvSpPr>
         <p:spPr>
           <a:xfrm>
-            <a:off x="868680" y="4096512"/>
-            <a:ext cx="3657600" cy="1783080"/>
+            <a:off x="868680" y="4142231"/>
+            <a:ext cx="3657600" cy="1828800"/>
           </a:xfrm>
           <a:prstGeom prst="rect">
             <a:avLst/>
@@ -5752,9 +5907,9 @@
               <a:spcAft>
                 <a:spcPts val="400"/>
               </a:spcAft>
-              <a:defRPr sz="1400" b="1">
-                <a:solidFill>
-                  <a:srgbClr val="085444"/>
+              <a:defRPr sz="1350" b="1">
+                <a:solidFill>
+                  <a:srgbClr val="0B3D33"/>
                 </a:solidFill>
                 <a:latin typeface="Georgia"/>
               </a:defRPr>
@@ -5765,9 +5920,9 @@
           </a:p>
           <a:p>
             <a:pPr>
-              <a:defRPr sz="1050">
-                <a:solidFill>
-                  <a:srgbClr val="6C7A73"/>
+              <a:defRPr sz="1000">
+                <a:solidFill>
+                  <a:srgbClr val="5F6E67"/>
                 </a:solidFill>
               </a:defRPr>
             </a:pPr>
@@ -5786,17 +5941,17 @@
         <p:spPr>
           <a:xfrm>
             <a:off x="4846320" y="1691640"/>
-            <a:ext cx="2468880" cy="4389120"/>
+            <a:ext cx="2468880" cy="4480560"/>
           </a:xfrm>
           <a:prstGeom prst="roundRect">
             <a:avLst/>
           </a:prstGeom>
           <a:solidFill>
-            <a:srgbClr val="121816"/>
+            <a:srgbClr val="141A18"/>
           </a:solidFill>
           <a:ln w="19050">
             <a:solidFill>
-              <a:srgbClr val="D97706"/>
+              <a:srgbClr val="D98210"/>
             </a:solidFill>
           </a:ln>
         </p:spPr>
@@ -5839,7 +5994,7 @@
         <p:spPr>
           <a:xfrm>
             <a:off x="4919472" y="1764792"/>
-            <a:ext cx="2322576" cy="4242816"/>
+            <a:ext cx="2322576" cy="4334256"/>
           </a:xfrm>
           <a:prstGeom prst="rect">
             <a:avLst/>
@@ -5855,7 +6010,7 @@
         <p:spPr>
           <a:xfrm>
             <a:off x="7498079" y="1691640"/>
-            <a:ext cx="3931920" cy="2103120"/>
+            <a:ext cx="3962095" cy="2148840"/>
           </a:xfrm>
           <a:prstGeom prst="roundRect">
             <a:avLst/>
@@ -5865,7 +6020,7 @@
           </a:solidFill>
           <a:ln w="12700">
             <a:solidFill>
-              <a:srgbClr val="E6DED4"/>
+              <a:srgbClr val="E4DCD2"/>
             </a:solidFill>
           </a:ln>
         </p:spPr>
@@ -5900,7 +6055,7 @@
         <p:spPr>
           <a:xfrm>
             <a:off x="7635240" y="1856232"/>
-            <a:ext cx="3657600" cy="1783080"/>
+            <a:ext cx="3657600" cy="1828800"/>
           </a:xfrm>
           <a:prstGeom prst="rect">
             <a:avLst/>
@@ -5917,9 +6072,9 @@
               <a:spcAft>
                 <a:spcPts val="400"/>
               </a:spcAft>
-              <a:defRPr sz="1400" b="1">
-                <a:solidFill>
-                  <a:srgbClr val="085444"/>
+              <a:defRPr sz="1350" b="1">
+                <a:solidFill>
+                  <a:srgbClr val="0B3D33"/>
                 </a:solidFill>
                 <a:latin typeface="Georgia"/>
               </a:defRPr>
@@ -5930,9 +6085,9 @@
           </a:p>
           <a:p>
             <a:pPr>
-              <a:defRPr sz="1050">
-                <a:solidFill>
-                  <a:srgbClr val="6C7A73"/>
+              <a:defRPr sz="1000">
+                <a:solidFill>
+                  <a:srgbClr val="5F6E67"/>
                 </a:solidFill>
               </a:defRPr>
             </a:pPr>
@@ -5950,8 +6105,8 @@
         </p:nvSpPr>
         <p:spPr>
           <a:xfrm>
-            <a:off x="7498079" y="3931920"/>
-            <a:ext cx="3931920" cy="2103120"/>
+            <a:off x="7498079" y="3977639"/>
+            <a:ext cx="3962095" cy="2148840"/>
           </a:xfrm>
           <a:prstGeom prst="roundRect">
             <a:avLst/>
@@ -5961,7 +6116,7 @@
           </a:solidFill>
           <a:ln w="12700">
             <a:solidFill>
-              <a:srgbClr val="E6DED4"/>
+              <a:srgbClr val="E4DCD2"/>
             </a:solidFill>
           </a:ln>
         </p:spPr>
@@ -5995,8 +6150,8 @@
         </p:nvSpPr>
         <p:spPr>
           <a:xfrm>
-            <a:off x="7635240" y="4096512"/>
-            <a:ext cx="3657600" cy="1783080"/>
+            <a:off x="7635240" y="4142231"/>
+            <a:ext cx="3657600" cy="1828800"/>
           </a:xfrm>
           <a:prstGeom prst="rect">
             <a:avLst/>
@@ -6013,9 +6168,9 @@
               <a:spcAft>
                 <a:spcPts val="400"/>
               </a:spcAft>
-              <a:defRPr sz="1400" b="1">
-                <a:solidFill>
-                  <a:srgbClr val="085444"/>
+              <a:defRPr sz="1350" b="1">
+                <a:solidFill>
+                  <a:srgbClr val="0B3D33"/>
                 </a:solidFill>
                 <a:latin typeface="Georgia"/>
               </a:defRPr>
@@ -6026,9 +6181,9 @@
           </a:p>
           <a:p>
             <a:pPr>
-              <a:defRPr sz="1050">
-                <a:solidFill>
-                  <a:srgbClr val="6C7A73"/>
+              <a:defRPr sz="1000">
+                <a:solidFill>
+                  <a:srgbClr val="5F6E67"/>
                 </a:solidFill>
               </a:defRPr>
             </a:pPr>
@@ -6063,7 +6218,7 @@
             <a:pPr>
               <a:defRPr sz="900">
                 <a:solidFill>
-                  <a:srgbClr val="6C7A73"/>
+                  <a:srgbClr val="5F6E67"/>
                 </a:solidFill>
                 <a:latin typeface="Arial"/>
               </a:defRPr>
@@ -6107,7 +6262,7 @@
             <a:avLst/>
           </a:prstGeom>
           <a:solidFill>
-            <a:srgbClr val="FAF8F4"/>
+            <a:srgbClr val="FAF7F2"/>
           </a:solidFill>
           <a:ln>
             <a:noFill/>
@@ -6160,7 +6315,7 @@
             <a:pPr>
               <a:defRPr sz="1050" b="1">
                 <a:solidFill>
-                  <a:srgbClr val="9E4A0C"/>
+                  <a:srgbClr val="A84D0E"/>
                 </a:solidFill>
                 <a:latin typeface="Arial"/>
               </a:defRPr>
@@ -6179,7 +6334,7 @@
         </p:nvSpPr>
         <p:spPr>
           <a:xfrm>
-            <a:off x="731520" y="685800"/>
+            <a:off x="731520" y="676656"/>
             <a:ext cx="10698480" cy="594360"/>
           </a:xfrm>
           <a:prstGeom prst="rect">
@@ -6196,7 +6351,7 @@
             <a:pPr>
               <a:defRPr sz="2300" b="1">
                 <a:solidFill>
-                  <a:srgbClr val="085444"/>
+                  <a:srgbClr val="0B3D33"/>
                 </a:solidFill>
                 <a:latin typeface="Georgia"/>
               </a:defRPr>
@@ -6215,7 +6370,7 @@
         </p:nvSpPr>
         <p:spPr>
           <a:xfrm>
-            <a:off x="731520" y="1261872"/>
+            <a:off x="731520" y="1243584"/>
             <a:ext cx="10698480" cy="365760"/>
           </a:xfrm>
           <a:prstGeom prst="rect">
@@ -6230,9 +6385,9 @@
           <a:lstStyle/>
           <a:p>
             <a:pPr>
-              <a:defRPr sz="1200">
-                <a:solidFill>
-                  <a:srgbClr val="6C7A73"/>
+              <a:defRPr sz="1150">
+                <a:solidFill>
+                  <a:srgbClr val="5F6E67"/>
                 </a:solidFill>
                 <a:latin typeface="Arial"/>
               </a:defRPr>
@@ -6252,7 +6407,7 @@
         <p:spPr>
           <a:xfrm>
             <a:off x="731520" y="1691640"/>
-            <a:ext cx="7772400" cy="4389120"/>
+            <a:ext cx="7772400" cy="4480560"/>
           </a:xfrm>
           <a:prstGeom prst="roundRect">
             <a:avLst/>
@@ -6262,7 +6417,7 @@
           </a:solidFill>
           <a:ln w="12700">
             <a:solidFill>
-              <a:srgbClr val="E6DED4"/>
+              <a:srgbClr val="E4DCD2"/>
             </a:solidFill>
           </a:ln>
         </p:spPr>
@@ -6297,7 +6452,7 @@
         <p:spPr>
           <a:xfrm>
             <a:off x="914400" y="1783080"/>
-            <a:ext cx="7406640" cy="4206240"/>
+            <a:ext cx="7406640" cy="4297680"/>
           </a:xfrm>
           <a:prstGeom prst="rect">
             <a:avLst/>
@@ -6313,7 +6468,7 @@
             <a:pPr>
               <a:defRPr sz="1100" b="1">
                 <a:solidFill>
-                  <a:srgbClr val="9E4A0C"/>
+                  <a:srgbClr val="A84D0E"/>
                 </a:solidFill>
               </a:defRPr>
             </a:pPr>
@@ -6326,21 +6481,21 @@
               <a:spcAft>
                 <a:spcPts val="600"/>
               </a:spcAft>
-              <a:defRPr sz="1000">
-                <a:solidFill>
-                  <a:srgbClr val="1A2420"/>
-                </a:solidFill>
-              </a:defRPr>
-            </a:pPr>
-            <a:r>
-              <a:t>Yatri steps off train at Jammu Tawi (JAT) or IXJ Airport. Opens jammukhoj.in directly with 1 tap. Zero mandatory login barrier.</a:t>
+              <a:defRPr sz="950">
+                <a:solidFill>
+                  <a:srgbClr val="18221E"/>
+                </a:solidFill>
+              </a:defRPr>
+            </a:pPr>
+            <a:r>
+              <a:t>Yatri steps off train at Jammu Tawi (JAT) or IXJ Airport. Opens jammukhoj.in directly with 1 tap. Zero mandatory app-store download or login wall.</a:t>
             </a:r>
           </a:p>
           <a:p>
             <a:pPr>
               <a:defRPr sz="1100" b="1">
                 <a:solidFill>
-                  <a:srgbClr val="9E4A0C"/>
+                  <a:srgbClr val="A84D0E"/>
                 </a:solidFill>
               </a:defRPr>
             </a:pPr>
@@ -6353,9 +6508,9 @@
               <a:spcAft>
                 <a:spcPts val="600"/>
               </a:spcAft>
-              <a:defRPr sz="1000">
-                <a:solidFill>
-                  <a:srgbClr val="1A2420"/>
+              <a:defRPr sz="950">
+                <a:solidFill>
+                  <a:srgbClr val="18221E"/>
                 </a:solidFill>
               </a:defRPr>
             </a:pPr>
@@ -6367,7 +6522,7 @@
             <a:pPr>
               <a:defRPr sz="1100" b="1">
                 <a:solidFill>
-                  <a:srgbClr val="9E4A0C"/>
+                  <a:srgbClr val="A84D0E"/>
                 </a:solidFill>
               </a:defRPr>
             </a:pPr>
@@ -6380,9 +6535,9 @@
               <a:spcAft>
                 <a:spcPts val="600"/>
               </a:spcAft>
-              <a:defRPr sz="1000">
-                <a:solidFill>
-                  <a:srgbClr val="1A2420"/>
+              <a:defRPr sz="950">
+                <a:solidFill>
+                  <a:srgbClr val="18221E"/>
                 </a:solidFill>
               </a:defRPr>
             </a:pPr>
@@ -6394,7 +6549,7 @@
             <a:pPr>
               <a:defRPr sz="1100" b="1">
                 <a:solidFill>
-                  <a:srgbClr val="9E4A0C"/>
+                  <a:srgbClr val="A84D0E"/>
                 </a:solidFill>
               </a:defRPr>
             </a:pPr>
@@ -6407,9 +6562,9 @@
               <a:spcAft>
                 <a:spcPts val="600"/>
               </a:spcAft>
-              <a:defRPr sz="1000">
-                <a:solidFill>
-                  <a:srgbClr val="1A2420"/>
+              <a:defRPr sz="950">
+                <a:solidFill>
+                  <a:srgbClr val="18221E"/>
                 </a:solidFill>
               </a:defRPr>
             </a:pPr>
@@ -6421,7 +6576,7 @@
             <a:pPr>
               <a:defRPr sz="1100" b="1">
                 <a:solidFill>
-                  <a:srgbClr val="9E4A0C"/>
+                  <a:srgbClr val="A84D0E"/>
                 </a:solidFill>
               </a:defRPr>
             </a:pPr>
@@ -6434,9 +6589,9 @@
               <a:spcAft>
                 <a:spcPts val="600"/>
               </a:spcAft>
-              <a:defRPr sz="1000">
-                <a:solidFill>
-                  <a:srgbClr val="1A2420"/>
+              <a:defRPr sz="950">
+                <a:solidFill>
+                  <a:srgbClr val="18221E"/>
                 </a:solidFill>
               </a:defRPr>
             </a:pPr>
@@ -6455,17 +6610,17 @@
         <p:spPr>
           <a:xfrm>
             <a:off x="8778240" y="1691640"/>
-            <a:ext cx="2651760" cy="4389120"/>
+            <a:ext cx="2681935" cy="4480560"/>
           </a:xfrm>
           <a:prstGeom prst="roundRect">
             <a:avLst/>
           </a:prstGeom>
           <a:solidFill>
-            <a:srgbClr val="121816"/>
+            <a:srgbClr val="141A18"/>
           </a:solidFill>
           <a:ln w="19050">
             <a:solidFill>
-              <a:srgbClr val="D97706"/>
+              <a:srgbClr val="D98210"/>
             </a:solidFill>
           </a:ln>
         </p:spPr>
@@ -6508,7 +6663,7 @@
         <p:spPr>
           <a:xfrm>
             <a:off x="8851392" y="1764792"/>
-            <a:ext cx="2505456" cy="4242816"/>
+            <a:ext cx="2535631" cy="4334256"/>
           </a:xfrm>
           <a:prstGeom prst="rect">
             <a:avLst/>
@@ -6540,7 +6695,7 @@
             <a:pPr>
               <a:defRPr sz="900">
                 <a:solidFill>
-                  <a:srgbClr val="6C7A73"/>
+                  <a:srgbClr val="5F6E67"/>
                 </a:solidFill>
                 <a:latin typeface="Arial"/>
               </a:defRPr>
@@ -6584,7 +6739,7 @@
             <a:avLst/>
           </a:prstGeom>
           <a:solidFill>
-            <a:srgbClr val="FAF8F4"/>
+            <a:srgbClr val="FAF7F2"/>
           </a:solidFill>
           <a:ln>
             <a:noFill/>
@@ -6637,7 +6792,7 @@
             <a:pPr>
               <a:defRPr sz="1050" b="1">
                 <a:solidFill>
-                  <a:srgbClr val="9E4A0C"/>
+                  <a:srgbClr val="A84D0E"/>
                 </a:solidFill>
                 <a:latin typeface="Arial"/>
               </a:defRPr>
@@ -6656,7 +6811,7 @@
         </p:nvSpPr>
         <p:spPr>
           <a:xfrm>
-            <a:off x="731520" y="685800"/>
+            <a:off x="731520" y="676656"/>
             <a:ext cx="10698480" cy="594360"/>
           </a:xfrm>
           <a:prstGeom prst="rect">
@@ -6673,7 +6828,7 @@
             <a:pPr>
               <a:defRPr sz="2300" b="1">
                 <a:solidFill>
-                  <a:srgbClr val="085444"/>
+                  <a:srgbClr val="0B3D33"/>
                 </a:solidFill>
                 <a:latin typeface="Georgia"/>
               </a:defRPr>
@@ -6692,7 +6847,7 @@
         </p:nvSpPr>
         <p:spPr>
           <a:xfrm>
-            <a:off x="731520" y="1261872"/>
+            <a:off x="731520" y="1243584"/>
             <a:ext cx="10698480" cy="365760"/>
           </a:xfrm>
           <a:prstGeom prst="rect">
@@ -6707,9 +6862,9 @@
           <a:lstStyle/>
           <a:p>
             <a:pPr>
-              <a:defRPr sz="1200">
-                <a:solidFill>
-                  <a:srgbClr val="6C7A73"/>
+              <a:defRPr sz="1150">
+                <a:solidFill>
+                  <a:srgbClr val="5F6E67"/>
                 </a:solidFill>
                 <a:latin typeface="Arial"/>
               </a:defRPr>
@@ -6730,7 +6885,7 @@
         </p:nvGraphicFramePr>
         <p:xfrm>
           <a:off x="731520" y="1691640"/>
-          <a:ext cx="7772400" cy="4389120"/>
+          <a:ext cx="7772400" cy="4480560"/>
         </p:xfrm>
         <a:graphic>
           <a:graphicData uri="http://schemas.openxmlformats.org/drawingml/2006/table">
@@ -6744,7 +6899,7 @@
                 <a:gridCol w="1920240"/>
                 <a:gridCol w="2194560"/>
               </a:tblGrid>
-              <a:tr h="731520">
+              <a:tr h="746760">
                 <a:tc>
                   <a:txBody>
                     <a:bodyPr/>
@@ -6764,7 +6919,7 @@
                   </a:txBody>
                   <a:tcPr>
                     <a:solidFill>
-                      <a:srgbClr val="0C2D26"/>
+                      <a:srgbClr val="07241E"/>
                     </a:solidFill>
                   </a:tcPr>
                 </a:tc>
@@ -6787,7 +6942,7 @@
                   </a:txBody>
                   <a:tcPr>
                     <a:solidFill>
-                      <a:srgbClr val="0C2D26"/>
+                      <a:srgbClr val="07241E"/>
                     </a:solidFill>
                   </a:tcPr>
                 </a:tc>
@@ -6810,7 +6965,7 @@
                   </a:txBody>
                   <a:tcPr>
                     <a:solidFill>
-                      <a:srgbClr val="0C2D26"/>
+                      <a:srgbClr val="07241E"/>
                     </a:solidFill>
                   </a:tcPr>
                 </a:tc>
@@ -6822,7 +6977,7 @@
                       <a:pPr>
                         <a:defRPr sz="1050" b="1">
                           <a:solidFill>
-                            <a:srgbClr val="D97706"/>
+                            <a:srgbClr val="D98210"/>
                           </a:solidFill>
                         </a:defRPr>
                       </a:pPr>
@@ -6833,12 +6988,12 @@
                   </a:txBody>
                   <a:tcPr>
                     <a:solidFill>
-                      <a:srgbClr val="085444"/>
+                      <a:srgbClr val="0B3D33"/>
                     </a:solidFill>
                   </a:tcPr>
                 </a:tc>
               </a:tr>
-              <a:tr h="731520">
+              <a:tr h="746760">
                 <a:tc>
                   <a:txBody>
                     <a:bodyPr/>
@@ -6847,7 +7002,7 @@
                       <a:pPr>
                         <a:defRPr sz="950" b="1">
                           <a:solidFill>
-                            <a:srgbClr val="1A2420"/>
+                            <a:srgbClr val="18221E"/>
                           </a:solidFill>
                           <a:latin typeface="Arial"/>
                         </a:defRPr>
@@ -6871,7 +7026,7 @@
                       <a:pPr>
                         <a:defRPr sz="950">
                           <a:solidFill>
-                            <a:srgbClr val="6C7A73"/>
+                            <a:srgbClr val="5F6E67"/>
                           </a:solidFill>
                           <a:latin typeface="Arial"/>
                         </a:defRPr>
@@ -6895,7 +7050,7 @@
                       <a:pPr>
                         <a:defRPr sz="950">
                           <a:solidFill>
-                            <a:srgbClr val="6C7A73"/>
+                            <a:srgbClr val="5F6E67"/>
                           </a:solidFill>
                           <a:latin typeface="Arial"/>
                         </a:defRPr>
@@ -6919,7 +7074,7 @@
                       <a:pPr>
                         <a:defRPr sz="950" b="1">
                           <a:solidFill>
-                            <a:srgbClr val="085444"/>
+                            <a:srgbClr val="0B3D33"/>
                           </a:solidFill>
                           <a:latin typeface="Arial"/>
                         </a:defRPr>
@@ -6931,12 +7086,12 @@
                   </a:txBody>
                   <a:tcPr>
                     <a:solidFill>
-                      <a:srgbClr val="FFFFFF"/>
+                      <a:srgbClr val="EEF7F2"/>
                     </a:solidFill>
                   </a:tcPr>
                 </a:tc>
               </a:tr>
-              <a:tr h="731520">
+              <a:tr h="746760">
                 <a:tc>
                   <a:txBody>
                     <a:bodyPr/>
@@ -6945,7 +7100,7 @@
                       <a:pPr>
                         <a:defRPr sz="950" b="1">
                           <a:solidFill>
-                            <a:srgbClr val="1A2420"/>
+                            <a:srgbClr val="18221E"/>
                           </a:solidFill>
                           <a:latin typeface="Arial"/>
                         </a:defRPr>
@@ -6957,7 +7112,7 @@
                   </a:txBody>
                   <a:tcPr>
                     <a:solidFill>
-                      <a:srgbClr val="F4EFE9"/>
+                      <a:srgbClr val="F3EEE6"/>
                     </a:solidFill>
                   </a:tcPr>
                 </a:tc>
@@ -6969,7 +7124,7 @@
                       <a:pPr>
                         <a:defRPr sz="950">
                           <a:solidFill>
-                            <a:srgbClr val="6C7A73"/>
+                            <a:srgbClr val="5F6E67"/>
                           </a:solidFill>
                           <a:latin typeface="Arial"/>
                         </a:defRPr>
@@ -6981,7 +7136,7 @@
                   </a:txBody>
                   <a:tcPr>
                     <a:solidFill>
-                      <a:srgbClr val="F4EFE9"/>
+                      <a:srgbClr val="F3EEE6"/>
                     </a:solidFill>
                   </a:tcPr>
                 </a:tc>
@@ -6993,7 +7148,7 @@
                       <a:pPr>
                         <a:defRPr sz="950">
                           <a:solidFill>
-                            <a:srgbClr val="6C7A73"/>
+                            <a:srgbClr val="5F6E67"/>
                           </a:solidFill>
                           <a:latin typeface="Arial"/>
                         </a:defRPr>
@@ -7005,7 +7160,7 @@
                   </a:txBody>
                   <a:tcPr>
                     <a:solidFill>
-                      <a:srgbClr val="F4EFE9"/>
+                      <a:srgbClr val="F3EEE6"/>
                     </a:solidFill>
                   </a:tcPr>
                 </a:tc>
@@ -7017,7 +7172,7 @@
                       <a:pPr>
                         <a:defRPr sz="950" b="1">
                           <a:solidFill>
-                            <a:srgbClr val="085444"/>
+                            <a:srgbClr val="0B3D33"/>
                           </a:solidFill>
                           <a:latin typeface="Arial"/>
                         </a:defRPr>
@@ -7029,12 +7184,12 @@
                   </a:txBody>
                   <a:tcPr>
                     <a:solidFill>
-                      <a:srgbClr val="F4EFE9"/>
+                      <a:srgbClr val="EEF7F2"/>
                     </a:solidFill>
                   </a:tcPr>
                 </a:tc>
               </a:tr>
-              <a:tr h="731520">
+              <a:tr h="746760">
                 <a:tc>
                   <a:txBody>
                     <a:bodyPr/>
@@ -7043,7 +7198,7 @@
                       <a:pPr>
                         <a:defRPr sz="950" b="1">
                           <a:solidFill>
-                            <a:srgbClr val="1A2420"/>
+                            <a:srgbClr val="18221E"/>
                           </a:solidFill>
                           <a:latin typeface="Arial"/>
                         </a:defRPr>
@@ -7067,7 +7222,7 @@
                       <a:pPr>
                         <a:defRPr sz="950">
                           <a:solidFill>
-                            <a:srgbClr val="6C7A73"/>
+                            <a:srgbClr val="5F6E67"/>
                           </a:solidFill>
                           <a:latin typeface="Arial"/>
                         </a:defRPr>
@@ -7091,7 +7246,7 @@
                       <a:pPr>
                         <a:defRPr sz="950">
                           <a:solidFill>
-                            <a:srgbClr val="6C7A73"/>
+                            <a:srgbClr val="5F6E67"/>
                           </a:solidFill>
                           <a:latin typeface="Arial"/>
                         </a:defRPr>
@@ -7115,7 +7270,7 @@
                       <a:pPr>
                         <a:defRPr sz="950" b="1">
                           <a:solidFill>
-                            <a:srgbClr val="085444"/>
+                            <a:srgbClr val="0B3D33"/>
                           </a:solidFill>
                           <a:latin typeface="Arial"/>
                         </a:defRPr>
@@ -7127,12 +7282,12 @@
                   </a:txBody>
                   <a:tcPr>
                     <a:solidFill>
-                      <a:srgbClr val="FFFFFF"/>
+                      <a:srgbClr val="EEF7F2"/>
                     </a:solidFill>
                   </a:tcPr>
                 </a:tc>
               </a:tr>
-              <a:tr h="731520">
+              <a:tr h="746760">
                 <a:tc>
                   <a:txBody>
                     <a:bodyPr/>
@@ -7141,7 +7296,7 @@
                       <a:pPr>
                         <a:defRPr sz="950" b="1">
                           <a:solidFill>
-                            <a:srgbClr val="1A2420"/>
+                            <a:srgbClr val="18221E"/>
                           </a:solidFill>
                           <a:latin typeface="Arial"/>
                         </a:defRPr>
@@ -7153,7 +7308,7 @@
                   </a:txBody>
                   <a:tcPr>
                     <a:solidFill>
-                      <a:srgbClr val="F4EFE9"/>
+                      <a:srgbClr val="F3EEE6"/>
                     </a:solidFill>
                   </a:tcPr>
                 </a:tc>
@@ -7165,7 +7320,7 @@
                       <a:pPr>
                         <a:defRPr sz="950">
                           <a:solidFill>
-                            <a:srgbClr val="6C7A73"/>
+                            <a:srgbClr val="5F6E67"/>
                           </a:solidFill>
                           <a:latin typeface="Arial"/>
                         </a:defRPr>
@@ -7177,7 +7332,7 @@
                   </a:txBody>
                   <a:tcPr>
                     <a:solidFill>
-                      <a:srgbClr val="F4EFE9"/>
+                      <a:srgbClr val="F3EEE6"/>
                     </a:solidFill>
                   </a:tcPr>
                 </a:tc>
@@ -7189,7 +7344,7 @@
                       <a:pPr>
                         <a:defRPr sz="950">
                           <a:solidFill>
-                            <a:srgbClr val="6C7A73"/>
+                            <a:srgbClr val="5F6E67"/>
                           </a:solidFill>
                           <a:latin typeface="Arial"/>
                         </a:defRPr>
@@ -7201,7 +7356,7 @@
                   </a:txBody>
                   <a:tcPr>
                     <a:solidFill>
-                      <a:srgbClr val="F4EFE9"/>
+                      <a:srgbClr val="F3EEE6"/>
                     </a:solidFill>
                   </a:tcPr>
                 </a:tc>
@@ -7213,7 +7368,7 @@
                       <a:pPr>
                         <a:defRPr sz="950" b="1">
                           <a:solidFill>
-                            <a:srgbClr val="085444"/>
+                            <a:srgbClr val="0B3D33"/>
                           </a:solidFill>
                           <a:latin typeface="Arial"/>
                         </a:defRPr>
@@ -7225,12 +7380,12 @@
                   </a:txBody>
                   <a:tcPr>
                     <a:solidFill>
-                      <a:srgbClr val="F4EFE9"/>
+                      <a:srgbClr val="EEF7F2"/>
                     </a:solidFill>
                   </a:tcPr>
                 </a:tc>
               </a:tr>
-              <a:tr h="731520">
+              <a:tr h="746760">
                 <a:tc>
                   <a:txBody>
                     <a:bodyPr/>
@@ -7239,7 +7394,7 @@
                       <a:pPr>
                         <a:defRPr sz="950" b="1">
                           <a:solidFill>
-                            <a:srgbClr val="1A2420"/>
+                            <a:srgbClr val="18221E"/>
                           </a:solidFill>
                           <a:latin typeface="Arial"/>
                         </a:defRPr>
@@ -7263,7 +7418,7 @@
                       <a:pPr>
                         <a:defRPr sz="950">
                           <a:solidFill>
-                            <a:srgbClr val="6C7A73"/>
+                            <a:srgbClr val="5F6E67"/>
                           </a:solidFill>
                           <a:latin typeface="Arial"/>
                         </a:defRPr>
@@ -7287,7 +7442,7 @@
                       <a:pPr>
                         <a:defRPr sz="950">
                           <a:solidFill>
-                            <a:srgbClr val="6C7A73"/>
+                            <a:srgbClr val="5F6E67"/>
                           </a:solidFill>
                           <a:latin typeface="Arial"/>
                         </a:defRPr>
@@ -7311,7 +7466,7 @@
                       <a:pPr>
                         <a:defRPr sz="950" b="1">
                           <a:solidFill>
-                            <a:srgbClr val="085444"/>
+                            <a:srgbClr val="0B3D33"/>
                           </a:solidFill>
                           <a:latin typeface="Arial"/>
                         </a:defRPr>
@@ -7323,7 +7478,7 @@
                   </a:txBody>
                   <a:tcPr>
                     <a:solidFill>
-                      <a:srgbClr val="FFFFFF"/>
+                      <a:srgbClr val="EEF7F2"/>
                     </a:solidFill>
                   </a:tcPr>
                 </a:tc>
@@ -7341,17 +7496,17 @@
         <p:spPr>
           <a:xfrm>
             <a:off x="8778240" y="1691640"/>
-            <a:ext cx="2651760" cy="4389120"/>
+            <a:ext cx="2681935" cy="4480560"/>
           </a:xfrm>
           <a:prstGeom prst="roundRect">
             <a:avLst/>
           </a:prstGeom>
           <a:solidFill>
-            <a:srgbClr val="121816"/>
+            <a:srgbClr val="141A18"/>
           </a:solidFill>
           <a:ln w="19050">
             <a:solidFill>
-              <a:srgbClr val="D97706"/>
+              <a:srgbClr val="D98210"/>
             </a:solidFill>
           </a:ln>
         </p:spPr>
@@ -7394,7 +7549,7 @@
         <p:spPr>
           <a:xfrm>
             <a:off x="8851392" y="1764792"/>
-            <a:ext cx="2505456" cy="4242816"/>
+            <a:ext cx="2535631" cy="4334256"/>
           </a:xfrm>
           <a:prstGeom prst="rect">
             <a:avLst/>
@@ -7426,7 +7581,7 @@
             <a:pPr>
               <a:defRPr sz="900">
                 <a:solidFill>
-                  <a:srgbClr val="6C7A73"/>
+                  <a:srgbClr val="5F6E67"/>
                 </a:solidFill>
                 <a:latin typeface="Arial"/>
               </a:defRPr>
@@ -7470,7 +7625,7 @@
             <a:avLst/>
           </a:prstGeom>
           <a:solidFill>
-            <a:srgbClr val="FAF8F4"/>
+            <a:srgbClr val="FAF7F2"/>
           </a:solidFill>
           <a:ln>
             <a:noFill/>
@@ -7523,7 +7678,7 @@
             <a:pPr>
               <a:defRPr sz="1050" b="1">
                 <a:solidFill>
-                  <a:srgbClr val="9E4A0C"/>
+                  <a:srgbClr val="A84D0E"/>
                 </a:solidFill>
                 <a:latin typeface="Arial"/>
               </a:defRPr>
@@ -7542,7 +7697,7 @@
         </p:nvSpPr>
         <p:spPr>
           <a:xfrm>
-            <a:off x="731520" y="685800"/>
+            <a:off x="731520" y="676656"/>
             <a:ext cx="10698480" cy="594360"/>
           </a:xfrm>
           <a:prstGeom prst="rect">
@@ -7559,7 +7714,7 @@
             <a:pPr>
               <a:defRPr sz="2300" b="1">
                 <a:solidFill>
-                  <a:srgbClr val="085444"/>
+                  <a:srgbClr val="0B3D33"/>
                 </a:solidFill>
                 <a:latin typeface="Georgia"/>
               </a:defRPr>
@@ -7578,7 +7733,7 @@
         </p:nvSpPr>
         <p:spPr>
           <a:xfrm>
-            <a:off x="731520" y="1261872"/>
+            <a:off x="731520" y="1243584"/>
             <a:ext cx="10698480" cy="365760"/>
           </a:xfrm>
           <a:prstGeom prst="rect">
@@ -7593,9 +7748,9 @@
           <a:lstStyle/>
           <a:p>
             <a:pPr>
-              <a:defRPr sz="1200">
-                <a:solidFill>
-                  <a:srgbClr val="6C7A73"/>
+              <a:defRPr sz="1150">
+                <a:solidFill>
+                  <a:srgbClr val="5F6E67"/>
                 </a:solidFill>
                 <a:latin typeface="Arial"/>
               </a:defRPr>
@@ -7615,17 +7770,17 @@
         <p:spPr>
           <a:xfrm>
             <a:off x="731520" y="1691640"/>
-            <a:ext cx="1828800" cy="1783080"/>
+            <a:ext cx="2560320" cy="1783080"/>
           </a:xfrm>
           <a:prstGeom prst="roundRect">
             <a:avLst/>
           </a:prstGeom>
           <a:solidFill>
-            <a:srgbClr val="085444"/>
+            <a:srgbClr val="0B3D33"/>
           </a:solidFill>
           <a:ln w="12700">
             <a:solidFill>
-              <a:srgbClr val="E6DED4"/>
+              <a:srgbClr val="E4DCD2"/>
             </a:solidFill>
           </a:ln>
         </p:spPr>
@@ -7659,8 +7814,8 @@
         </p:nvSpPr>
         <p:spPr>
           <a:xfrm>
-            <a:off x="822960" y="1783080"/>
-            <a:ext cx="1645920" cy="1600200"/>
+            <a:off x="841248" y="1783080"/>
+            <a:ext cx="2340864" cy="1600200"/>
           </a:xfrm>
           <a:prstGeom prst="rect">
             <a:avLst/>
@@ -7674,9 +7829,9 @@
           <a:lstStyle/>
           <a:p>
             <a:pPr>
-              <a:defRPr sz="2800" b="1">
-                <a:solidFill>
-                  <a:srgbClr val="D97706"/>
+              <a:defRPr sz="3200" b="1">
+                <a:solidFill>
+                  <a:srgbClr val="D98210"/>
                 </a:solidFill>
                 <a:latin typeface="Georgia"/>
               </a:defRPr>
@@ -7687,7 +7842,7 @@
           </a:p>
           <a:p>
             <a:pPr>
-              <a:defRPr sz="1050" b="1">
+              <a:defRPr sz="1100" b="1">
                 <a:solidFill>
                   <a:srgbClr val="FFFFFF"/>
                 </a:solidFill>
@@ -7701,12 +7856,12 @@
             <a:pPr>
               <a:defRPr sz="850">
                 <a:solidFill>
-                  <a:srgbClr val="F4EFE9"/>
-                </a:solidFill>
-              </a:defRPr>
-            </a:pPr>
-            <a:r>
-              <a:t>Extending stay from &lt;2h to 6-8h via safe circuits.</a:t>
+                  <a:srgbClr val="F3EEE6"/>
+                </a:solidFill>
+              </a:defRPr>
+            </a:pPr>
+            <a:r>
+              <a:t>Extending transit stay from &lt;2h to 6-8h through safe itineraries.</a:t>
             </a:r>
           </a:p>
         </p:txBody>
@@ -7719,18 +7874,18 @@
         </p:nvSpPr>
         <p:spPr>
           <a:xfrm>
-            <a:off x="2651760" y="1691640"/>
-            <a:ext cx="1828800" cy="1783080"/>
+            <a:off x="3429000" y="1691640"/>
+            <a:ext cx="2560320" cy="1783080"/>
           </a:xfrm>
           <a:prstGeom prst="roundRect">
             <a:avLst/>
           </a:prstGeom>
           <a:solidFill>
-            <a:srgbClr val="085444"/>
+            <a:srgbClr val="0B3D33"/>
           </a:solidFill>
           <a:ln w="12700">
             <a:solidFill>
-              <a:srgbClr val="E6DED4"/>
+              <a:srgbClr val="E4DCD2"/>
             </a:solidFill>
           </a:ln>
         </p:spPr>
@@ -7764,8 +7919,8 @@
         </p:nvSpPr>
         <p:spPr>
           <a:xfrm>
-            <a:off x="2743200" y="1783080"/>
-            <a:ext cx="1645920" cy="1600200"/>
+            <a:off x="3538728" y="1783080"/>
+            <a:ext cx="2340864" cy="1600200"/>
           </a:xfrm>
           <a:prstGeom prst="rect">
             <a:avLst/>
@@ -7779,9 +7934,9 @@
           <a:lstStyle/>
           <a:p>
             <a:pPr>
-              <a:defRPr sz="2800" b="1">
-                <a:solidFill>
-                  <a:srgbClr val="D97706"/>
+              <a:defRPr sz="3200" b="1">
+                <a:solidFill>
+                  <a:srgbClr val="D98210"/>
                 </a:solidFill>
                 <a:latin typeface="Georgia"/>
               </a:defRPr>
@@ -7792,7 +7947,7 @@
           </a:p>
           <a:p>
             <a:pPr>
-              <a:defRPr sz="1050" b="1">
+              <a:defRPr sz="1100" b="1">
                 <a:solidFill>
                   <a:srgbClr val="FFFFFF"/>
                 </a:solidFill>
@@ -7806,12 +7961,12 @@
             <a:pPr>
               <a:defRPr sz="850">
                 <a:solidFill>
-                  <a:srgbClr val="F4EFE9"/>
-                </a:solidFill>
-              </a:defRPr>
-            </a:pPr>
-            <a:r>
-              <a:t>Direct injection into local Dogra food, crafts &amp; transit.</a:t>
+                  <a:srgbClr val="F3EEE6"/>
+                </a:solidFill>
+              </a:defRPr>
+            </a:pPr>
+            <a:r>
+              <a:t>Direct injection into local Dogra food, crafts &amp; certified transit.</a:t>
             </a:r>
           </a:p>
         </p:txBody>
@@ -7824,18 +7979,18 @@
         </p:nvSpPr>
         <p:spPr>
           <a:xfrm>
-            <a:off x="4572000" y="1691640"/>
-            <a:ext cx="1828800" cy="1783080"/>
+            <a:off x="6126480" y="1691640"/>
+            <a:ext cx="2560320" cy="1783080"/>
           </a:xfrm>
           <a:prstGeom prst="roundRect">
             <a:avLst/>
           </a:prstGeom>
           <a:solidFill>
-            <a:srgbClr val="085444"/>
+            <a:srgbClr val="0B3D33"/>
           </a:solidFill>
           <a:ln w="12700">
             <a:solidFill>
-              <a:srgbClr val="E6DED4"/>
+              <a:srgbClr val="E4DCD2"/>
             </a:solidFill>
           </a:ln>
         </p:spPr>
@@ -7869,8 +8024,8 @@
         </p:nvSpPr>
         <p:spPr>
           <a:xfrm>
-            <a:off x="4663440" y="1783080"/>
-            <a:ext cx="1645920" cy="1600200"/>
+            <a:off x="6236208" y="1783080"/>
+            <a:ext cx="2340864" cy="1600200"/>
           </a:xfrm>
           <a:prstGeom prst="rect">
             <a:avLst/>
@@ -7884,9 +8039,9 @@
           <a:lstStyle/>
           <a:p>
             <a:pPr>
-              <a:defRPr sz="2800" b="1">
-                <a:solidFill>
-                  <a:srgbClr val="D97706"/>
+              <a:defRPr sz="3200" b="1">
+                <a:solidFill>
+                  <a:srgbClr val="D98210"/>
                 </a:solidFill>
                 <a:latin typeface="Georgia"/>
               </a:defRPr>
@@ -7897,26 +8052,26 @@
           </a:p>
           <a:p>
             <a:pPr>
-              <a:defRPr sz="1050" b="1">
+              <a:defRPr sz="1100" b="1">
                 <a:solidFill>
                   <a:srgbClr val="FFFFFF"/>
                 </a:solidFill>
               </a:defRPr>
             </a:pPr>
             <a:r>
-              <a:t>Family Savings</a:t>
+              <a:t>Avg Family Savings</a:t>
             </a:r>
           </a:p>
           <a:p>
             <a:pPr>
               <a:defRPr sz="850">
                 <a:solidFill>
-                  <a:srgbClr val="F4EFE9"/>
-                </a:solidFill>
-              </a:defRPr>
-            </a:pPr>
-            <a:r>
-              <a:t>Preventing exploitative cab fares and fake crafts.</a:t>
+                  <a:srgbClr val="F3EEE6"/>
+                </a:solidFill>
+              </a:defRPr>
+            </a:pPr>
+            <a:r>
+              <a:t>Preventing exploitative cab fares and spurious roadside craft purchases.</a:t>
             </a:r>
           </a:p>
         </p:txBody>
@@ -7929,18 +8084,18 @@
         </p:nvSpPr>
         <p:spPr>
           <a:xfrm>
-            <a:off x="6492240" y="1691640"/>
-            <a:ext cx="1828800" cy="1783080"/>
+            <a:off x="8823960" y="1691640"/>
+            <a:ext cx="2560320" cy="1783080"/>
           </a:xfrm>
           <a:prstGeom prst="roundRect">
             <a:avLst/>
           </a:prstGeom>
           <a:solidFill>
-            <a:srgbClr val="085444"/>
+            <a:srgbClr val="0B3D33"/>
           </a:solidFill>
           <a:ln w="12700">
             <a:solidFill>
-              <a:srgbClr val="E6DED4"/>
+              <a:srgbClr val="E4DCD2"/>
             </a:solidFill>
           </a:ln>
         </p:spPr>
@@ -7974,8 +8129,8 @@
         </p:nvSpPr>
         <p:spPr>
           <a:xfrm>
-            <a:off x="6583680" y="1783080"/>
-            <a:ext cx="1645920" cy="1600200"/>
+            <a:off x="8933688" y="1783080"/>
+            <a:ext cx="2340864" cy="1600200"/>
           </a:xfrm>
           <a:prstGeom prst="rect">
             <a:avLst/>
@@ -7989,9 +8144,9 @@
           <a:lstStyle/>
           <a:p>
             <a:pPr>
-              <a:defRPr sz="2800" b="1">
-                <a:solidFill>
-                  <a:srgbClr val="D97706"/>
+              <a:defRPr sz="3200" b="1">
+                <a:solidFill>
+                  <a:srgbClr val="D98210"/>
                 </a:solidFill>
                 <a:latin typeface="Georgia"/>
               </a:defRPr>
@@ -8002,7 +8157,7 @@
           </a:p>
           <a:p>
             <a:pPr>
-              <a:defRPr sz="1050" b="1">
+              <a:defRPr sz="1100" b="1">
                 <a:solidFill>
                   <a:srgbClr val="FFFFFF"/>
                 </a:solidFill>
@@ -8016,12 +8171,12 @@
             <a:pPr>
               <a:defRPr sz="850">
                 <a:solidFill>
-                  <a:srgbClr val="F4EFE9"/>
-                </a:solidFill>
-              </a:defRPr>
-            </a:pPr>
-            <a:r>
-              <a:t>100% adherence to safety return buffers.</a:t>
+                  <a:srgbClr val="F3EEE6"/>
+                </a:solidFill>
+              </a:defRPr>
+            </a:pPr>
+            <a:r>
+              <a:t>100% adherence to conservative rail &amp; flight safety buffers.</a:t>
             </a:r>
           </a:p>
         </p:txBody>
@@ -8035,7 +8190,7 @@
         <p:spPr>
           <a:xfrm>
             <a:off x="731520" y="3611880"/>
-            <a:ext cx="7772400" cy="2468880"/>
+            <a:ext cx="5257800" cy="2560320"/>
           </a:xfrm>
           <a:prstGeom prst="roundRect">
             <a:avLst/>
@@ -8045,7 +8200,7 @@
           </a:solidFill>
           <a:ln w="12700">
             <a:solidFill>
-              <a:srgbClr val="E6DED4"/>
+              <a:srgbClr val="E4DCD2"/>
             </a:solidFill>
           </a:ln>
         </p:spPr>
@@ -8080,7 +8235,7 @@
         <p:spPr>
           <a:xfrm>
             <a:off x="914400" y="3703320"/>
-            <a:ext cx="7406640" cy="2286000"/>
+            <a:ext cx="4892040" cy="2377440"/>
           </a:xfrm>
           <a:prstGeom prst="rect">
             <a:avLst/>
@@ -8094,9 +8249,12 @@
           <a:lstStyle/>
           <a:p>
             <a:pPr>
+              <a:spcAft>
+                <a:spcPts val="400"/>
+              </a:spcAft>
               <a:defRPr sz="1300" b="1">
                 <a:solidFill>
-                  <a:srgbClr val="085444"/>
+                  <a:srgbClr val="0B3D33"/>
                 </a:solidFill>
                 <a:latin typeface="Georgia"/>
               </a:defRPr>
@@ -8107,42 +8265,14 @@
           </a:p>
           <a:p>
             <a:pPr>
-              <a:spcAft>
-                <a:spcPts val="800"/>
-              </a:spcAft>
               <a:defRPr sz="1000">
                 <a:solidFill>
-                  <a:srgbClr val="6C7A73"/>
-                </a:solidFill>
-              </a:defRPr>
-            </a:pPr>
-            <a:r>
-              <a:t>Empowers Basohli painters, Pashmina weavers, and Bhaderwah farmers with verified outlet discovery and fake-identification guides. Pilgrims purchase authentic GI certified heritage at fair benchmark prices directly supporting cottage industries.</a:t>
-            </a:r>
-          </a:p>
-          <a:p>
-            <a:pPr>
-              <a:defRPr sz="1300" b="1">
-                <a:solidFill>
-                  <a:srgbClr val="085444"/>
-                </a:solidFill>
-                <a:latin typeface="Georgia"/>
-              </a:defRPr>
-            </a:pPr>
-            <a:r>
-              <a:t>🛡️ Public Safety &amp; Yatra Welfare</a:t>
-            </a:r>
-          </a:p>
-          <a:p>
-            <a:pPr>
-              <a:defRPr sz="1000">
-                <a:solidFill>
-                  <a:srgbClr val="6C7A73"/>
-                </a:solidFill>
-              </a:defRPr>
-            </a:pPr>
-            <a:r>
-              <a:t>1-Tap WhatsApp GPS SOS dispatcher and offline dialers for ERSS 112, SMVDSB Shrine Helplines, and women's assistance. Real-time dynamic temple crowd meters and aarti timings prevent stampedes and reduce elder exhaustion during Navratri surges.</a:t>
+                  <a:srgbClr val="5F6E67"/>
+                </a:solidFill>
+              </a:defRPr>
+            </a:pPr>
+            <a:r>
+              <a:t>Empowers Basohli miniature painters, Pashmina weavers, and Bhaderwah Rajmash farmers with verified outlet discovery and fake-identification guides. Pilgrims purchase authentic GI certified heritage at fair benchmark prices directly supporting traditional craft families.</a:t>
             </a:r>
           </a:p>
         </p:txBody>
@@ -8155,18 +8285,18 @@
         </p:nvSpPr>
         <p:spPr>
           <a:xfrm>
-            <a:off x="8778240" y="1691640"/>
-            <a:ext cx="2651760" cy="4389120"/>
+            <a:off x="6202375" y="3611880"/>
+            <a:ext cx="5257800" cy="2560320"/>
           </a:xfrm>
           <a:prstGeom prst="roundRect">
             <a:avLst/>
           </a:prstGeom>
           <a:solidFill>
-            <a:srgbClr val="121816"/>
+            <a:srgbClr val="FFFFFF"/>
           </a:solidFill>
-          <a:ln w="19050">
+          <a:ln w="12700">
             <a:solidFill>
-              <a:srgbClr val="D97706"/>
+              <a:srgbClr val="E4DCD2"/>
             </a:solidFill>
           </a:ln>
         </p:spPr>
@@ -8192,30 +8322,57 @@
           </a:p>
         </p:txBody>
       </p:sp>
-      <p:pic>
-        <p:nvPicPr>
-          <p:cNvPr id="17" name="Picture 16" descr="app_attraction_detail.png"/>
-          <p:cNvPicPr>
-            <a:picLocks noChangeAspect="1"/>
-          </p:cNvPicPr>
-          <p:nvPr/>
-        </p:nvPicPr>
-        <p:blipFill>
-          <a:blip r:embed="rId2"/>
-          <a:stretch>
-            <a:fillRect/>
-          </a:stretch>
-        </p:blipFill>
-        <p:spPr>
-          <a:xfrm>
-            <a:off x="8851392" y="1764792"/>
-            <a:ext cx="2505456" cy="4242816"/>
+      <p:sp>
+        <p:nvSpPr>
+          <p:cNvPr id="17" name="TextBox 16"/>
+          <p:cNvSpPr txBox="1"/>
+          <p:nvPr/>
+        </p:nvSpPr>
+        <p:spPr>
+          <a:xfrm>
+            <a:off x="6385255" y="3703320"/>
+            <a:ext cx="4892040" cy="2377440"/>
           </a:xfrm>
           <a:prstGeom prst="rect">
             <a:avLst/>
           </a:prstGeom>
-        </p:spPr>
-      </p:pic>
+          <a:noFill/>
+        </p:spPr>
+        <p:txBody>
+          <a:bodyPr wrap="square">
+            <a:spAutoFit/>
+          </a:bodyPr>
+          <a:lstStyle/>
+          <a:p>
+            <a:pPr>
+              <a:spcAft>
+                <a:spcPts val="400"/>
+              </a:spcAft>
+              <a:defRPr sz="1300" b="1">
+                <a:solidFill>
+                  <a:srgbClr val="0B3D33"/>
+                </a:solidFill>
+                <a:latin typeface="Georgia"/>
+              </a:defRPr>
+            </a:pPr>
+            <a:r>
+              <a:t>🛡️ Public Safety &amp; Yatra Welfare</a:t>
+            </a:r>
+          </a:p>
+          <a:p>
+            <a:pPr>
+              <a:defRPr sz="1000">
+                <a:solidFill>
+                  <a:srgbClr val="5F6E67"/>
+                </a:solidFill>
+              </a:defRPr>
+            </a:pPr>
+            <a:r>
+              <a:t>1-Tap WhatsApp GPS SOS dispatcher and offline dialers for ERSS 112, SMVDSB Shrine Helplines, and women's assistance. Real-time dynamic temple crowd meters and aarti timings prevent stampedes and reduce elder exhaustion during Navratri surges.</a:t>
+            </a:r>
+          </a:p>
+        </p:txBody>
+      </p:sp>
       <p:sp>
         <p:nvSpPr>
           <p:cNvPr id="18" name="TextBox 17"/>
@@ -8241,7 +8398,7 @@
             <a:pPr>
               <a:defRPr sz="900">
                 <a:solidFill>
-                  <a:srgbClr val="6C7A73"/>
+                  <a:srgbClr val="5F6E67"/>
                 </a:solidFill>
                 <a:latin typeface="Arial"/>
               </a:defRPr>
@@ -8285,7 +8442,7 @@
             <a:avLst/>
           </a:prstGeom>
           <a:solidFill>
-            <a:srgbClr val="FAF8F4"/>
+            <a:srgbClr val="FAF7F2"/>
           </a:solidFill>
           <a:ln>
             <a:noFill/>
@@ -8338,7 +8495,7 @@
             <a:pPr>
               <a:defRPr sz="1050" b="1">
                 <a:solidFill>
-                  <a:srgbClr val="9E4A0C"/>
+                  <a:srgbClr val="A84D0E"/>
                 </a:solidFill>
                 <a:latin typeface="Arial"/>
               </a:defRPr>
@@ -8357,7 +8514,7 @@
         </p:nvSpPr>
         <p:spPr>
           <a:xfrm>
-            <a:off x="731520" y="685800"/>
+            <a:off x="731520" y="676656"/>
             <a:ext cx="10698480" cy="594360"/>
           </a:xfrm>
           <a:prstGeom prst="rect">
@@ -8374,7 +8531,7 @@
             <a:pPr>
               <a:defRPr sz="2300" b="1">
                 <a:solidFill>
-                  <a:srgbClr val="085444"/>
+                  <a:srgbClr val="0B3D33"/>
                 </a:solidFill>
                 <a:latin typeface="Georgia"/>
               </a:defRPr>
@@ -8393,7 +8550,7 @@
         </p:nvSpPr>
         <p:spPr>
           <a:xfrm>
-            <a:off x="731520" y="1261872"/>
+            <a:off x="731520" y="1243584"/>
             <a:ext cx="10698480" cy="365760"/>
           </a:xfrm>
           <a:prstGeom prst="rect">
@@ -8408,9 +8565,9 @@
           <a:lstStyle/>
           <a:p>
             <a:pPr>
-              <a:defRPr sz="1200">
-                <a:solidFill>
-                  <a:srgbClr val="6C7A73"/>
+              <a:defRPr sz="1150">
+                <a:solidFill>
+                  <a:srgbClr val="5F6E67"/>
                 </a:solidFill>
                 <a:latin typeface="Arial"/>
               </a:defRPr>
@@ -8430,7 +8587,7 @@
         <p:spPr>
           <a:xfrm>
             <a:off x="731520" y="1691640"/>
-            <a:ext cx="7772400" cy="4389120"/>
+            <a:ext cx="2560320" cy="4480560"/>
           </a:xfrm>
           <a:prstGeom prst="roundRect">
             <a:avLst/>
@@ -8440,7 +8597,7 @@
           </a:solidFill>
           <a:ln w="12700">
             <a:solidFill>
-              <a:srgbClr val="E6DED4"/>
+              <a:srgbClr val="E4DCD2"/>
             </a:solidFill>
           </a:ln>
         </p:spPr>
@@ -8468,156 +8625,23 @@
       </p:sp>
       <p:sp>
         <p:nvSpPr>
-          <p:cNvPr id="7" name="TextBox 6"/>
-          <p:cNvSpPr txBox="1"/>
-          <p:nvPr/>
-        </p:nvSpPr>
-        <p:spPr>
-          <a:xfrm>
-            <a:off x="914400" y="1783080"/>
-            <a:ext cx="7406640" cy="4206240"/>
-          </a:xfrm>
-          <a:prstGeom prst="rect">
-            <a:avLst/>
-          </a:prstGeom>
-          <a:noFill/>
-        </p:spPr>
-        <p:txBody>
-          <a:bodyPr wrap="square">
-            <a:spAutoFit/>
-          </a:bodyPr>
-          <a:lstStyle/>
-          <a:p>
-            <a:pPr>
-              <a:defRPr sz="1100" b="1">
-                <a:solidFill>
-                  <a:srgbClr val="085444"/>
-                </a:solidFill>
-              </a:defRPr>
-            </a:pPr>
-            <a:r>
-              <a:t>Phase 1: Foundation (COMPLETED &amp; LIVE)</a:t>
-            </a:r>
-          </a:p>
-          <a:p>
-            <a:pPr>
-              <a:spcAft>
-                <a:spcPts val="1000"/>
-              </a:spcAft>
-              <a:defRPr sz="1000">
-                <a:solidFill>
-                  <a:srgbClr val="6C7A73"/>
-                </a:solidFill>
-              </a:defRPr>
-            </a:pPr>
-            <a:r>
-              <a:t>Live on jammukhoj.in • 100% offline PWA &amp; Android APK • 36+ attractions &amp; 44 automated tests passing • 1-Tap buffer planner &amp; transit matrix.</a:t>
-            </a:r>
-          </a:p>
-          <a:p>
-            <a:pPr>
-              <a:defRPr sz="1100" b="1">
-                <a:solidFill>
-                  <a:srgbClr val="9E4A0C"/>
-                </a:solidFill>
-              </a:defRPr>
-            </a:pPr>
-            <a:r>
-              <a:t>Phase 2: Transit Node Pilot (Q1-Q2 2027)</a:t>
-            </a:r>
-          </a:p>
-          <a:p>
-            <a:pPr>
-              <a:spcAft>
-                <a:spcPts val="1000"/>
-              </a:spcAft>
-              <a:defRPr sz="1000">
-                <a:solidFill>
-                  <a:srgbClr val="6C7A73"/>
-                </a:solidFill>
-              </a:defRPr>
-            </a:pPr>
-            <a:r>
-              <a:t>QR code touchpoints at Jammu Tawi &amp; Katra concourses • J&amp;K Smart City e-bus live status integration • Onboard 50+ verified local dhabas &amp; GI artisans • Target: 50,000 monthly users.</a:t>
-            </a:r>
-          </a:p>
-          <a:p>
-            <a:pPr>
-              <a:defRPr sz="1100" b="1">
-                <a:solidFill>
-                  <a:srgbClr val="9E4A0C"/>
-                </a:solidFill>
-              </a:defRPr>
-            </a:pPr>
-            <a:r>
-              <a:t>Phase 3: Institutional Sync (Q3 2027)</a:t>
-            </a:r>
-          </a:p>
-          <a:p>
-            <a:pPr>
-              <a:spcAft>
-                <a:spcPts val="1000"/>
-              </a:spcAft>
-              <a:defRPr sz="1000">
-                <a:solidFill>
-                  <a:srgbClr val="6C7A73"/>
-                </a:solidFill>
-              </a:defRPr>
-            </a:pPr>
-            <a:r>
-              <a:t>Official endorsement by J&amp;K Tourism Directorate • SMVDSB Katra battery-car &amp; RFID status tie-in • Railway Yatri Niwas booking cross-links • Target: 250,000 active yatris.</a:t>
-            </a:r>
-          </a:p>
-          <a:p>
-            <a:pPr>
-              <a:defRPr sz="1100" b="1">
-                <a:solidFill>
-                  <a:srgbClr val="9E4A0C"/>
-                </a:solidFill>
-              </a:defRPr>
-            </a:pPr>
-            <a:r>
-              <a:t>Phase 4: Ecosystem Scale (Q4 2027+)</a:t>
-            </a:r>
-          </a:p>
-          <a:p>
-            <a:pPr>
-              <a:spcAft>
-                <a:spcPts val="1000"/>
-              </a:spcAft>
-              <a:defRPr sz="1000">
-                <a:solidFill>
-                  <a:srgbClr val="6C7A73"/>
-                </a:solidFill>
-              </a:defRPr>
-            </a:pPr>
-            <a:r>
-              <a:t>Expansion to Bhaderwah, Kishtwar, Poonch &amp; Rajouri • Audio heritage guides in Dogri, Hindi &amp; English • Open-source blueprint for other pilgrim hubs (Varanasi, Tirupati).</a:t>
-            </a:r>
-          </a:p>
-        </p:txBody>
-      </p:sp>
-      <p:sp>
-        <p:nvSpPr>
-          <p:cNvPr id="8" name="Rounded Rectangle 7"/>
+          <p:cNvPr id="7" name="Rounded Rectangle 6"/>
           <p:cNvSpPr/>
           <p:nvPr/>
         </p:nvSpPr>
         <p:spPr>
           <a:xfrm>
-            <a:off x="8778240" y="1691640"/>
-            <a:ext cx="2651760" cy="4389120"/>
+            <a:off x="868680" y="1874520"/>
+            <a:ext cx="2286000" cy="365760"/>
           </a:xfrm>
           <a:prstGeom prst="roundRect">
             <a:avLst/>
           </a:prstGeom>
           <a:solidFill>
-            <a:srgbClr val="121816"/>
+            <a:srgbClr val="0B3D33"/>
           </a:solidFill>
-          <a:ln w="19050">
-            <a:solidFill>
-              <a:srgbClr val="D97706"/>
-            </a:solidFill>
+          <a:ln>
+            <a:noFill/>
           </a:ln>
         </p:spPr>
         <p:style>
@@ -8638,37 +8662,724 @@
           <a:bodyPr rtlCol="0" anchor="ctr"/>
           <a:lstStyle/>
           <a:p>
+            <a:pPr algn="ctr">
+              <a:defRPr sz="900" b="1">
+                <a:solidFill>
+                  <a:srgbClr val="FFFFFF"/>
+                </a:solidFill>
+              </a:defRPr>
+            </a:pPr>
+            <a:r>
+              <a:t>LIVE IN PRODUCTION</a:t>
+            </a:r>
+          </a:p>
+        </p:txBody>
+      </p:sp>
+      <p:sp>
+        <p:nvSpPr>
+          <p:cNvPr id="8" name="TextBox 7"/>
+          <p:cNvSpPr txBox="1"/>
+          <p:nvPr/>
+        </p:nvSpPr>
+        <p:spPr>
+          <a:xfrm>
+            <a:off x="868680" y="2331720"/>
+            <a:ext cx="2286000" cy="3657600"/>
+          </a:xfrm>
+          <a:prstGeom prst="rect">
+            <a:avLst/>
+          </a:prstGeom>
+          <a:noFill/>
+        </p:spPr>
+        <p:txBody>
+          <a:bodyPr wrap="square">
+            <a:spAutoFit/>
+          </a:bodyPr>
+          <a:lstStyle/>
+          <a:p>
+            <a:pPr>
+              <a:spcAft>
+                <a:spcPts val="1000"/>
+              </a:spcAft>
+              <a:defRPr sz="1200" b="1">
+                <a:solidFill>
+                  <a:srgbClr val="0B3D33"/>
+                </a:solidFill>
+                <a:latin typeface="Georgia"/>
+              </a:defRPr>
+            </a:pPr>
+            <a:r>
+              <a:t>Phase 1: Foundation</a:t>
+            </a:r>
+          </a:p>
+          <a:p>
+            <a:pPr>
+              <a:spcAft>
+                <a:spcPts val="500"/>
+              </a:spcAft>
+              <a:defRPr sz="919">
+                <a:solidFill>
+                  <a:srgbClr val="18221E"/>
+                </a:solidFill>
+              </a:defRPr>
+            </a:pPr>
+            <a:r>
+              <a:t>✔ Live on jammukhoj.in domain</a:t>
+            </a:r>
+          </a:p>
+          <a:p>
+            <a:pPr>
+              <a:spcAft>
+                <a:spcPts val="500"/>
+              </a:spcAft>
+              <a:defRPr sz="919">
+                <a:solidFill>
+                  <a:srgbClr val="18221E"/>
+                </a:solidFill>
+              </a:defRPr>
+            </a:pPr>
+            <a:r>
+              <a:t>✔ 100% offline PWA &amp; Android APK</a:t>
+            </a:r>
+          </a:p>
+          <a:p>
+            <a:pPr>
+              <a:spcAft>
+                <a:spcPts val="500"/>
+              </a:spcAft>
+              <a:defRPr sz="919">
+                <a:solidFill>
+                  <a:srgbClr val="18221E"/>
+                </a:solidFill>
+              </a:defRPr>
+            </a:pPr>
+            <a:r>
+              <a:t>✔ 36+ curated attractions &amp; maps</a:t>
+            </a:r>
+          </a:p>
+          <a:p>
+            <a:pPr>
+              <a:spcAft>
+                <a:spcPts val="500"/>
+              </a:spcAft>
+              <a:defRPr sz="919">
+                <a:solidFill>
+                  <a:srgbClr val="18221E"/>
+                </a:solidFill>
+              </a:defRPr>
+            </a:pPr>
+            <a:r>
+              <a:t>✔ 44 automated unit &amp; E2E tests passing</a:t>
+            </a:r>
+          </a:p>
+          <a:p>
+            <a:pPr>
+              <a:spcAft>
+                <a:spcPts val="500"/>
+              </a:spcAft>
+              <a:defRPr sz="919">
+                <a:solidFill>
+                  <a:srgbClr val="18221E"/>
+                </a:solidFill>
+              </a:defRPr>
+            </a:pPr>
+            <a:r>
+              <a:t>✔ 1-Tap buffer planner &amp; transit matrix</a:t>
+            </a:r>
+          </a:p>
+        </p:txBody>
+      </p:sp>
+      <p:sp>
+        <p:nvSpPr>
+          <p:cNvPr id="9" name="Rounded Rectangle 8"/>
+          <p:cNvSpPr/>
+          <p:nvPr/>
+        </p:nvSpPr>
+        <p:spPr>
+          <a:xfrm>
+            <a:off x="3429000" y="1691640"/>
+            <a:ext cx="2560320" cy="4480560"/>
+          </a:xfrm>
+          <a:prstGeom prst="roundRect">
+            <a:avLst/>
+          </a:prstGeom>
+          <a:solidFill>
+            <a:srgbClr val="FFFFFF"/>
+          </a:solidFill>
+          <a:ln w="12700">
+            <a:solidFill>
+              <a:srgbClr val="E4DCD2"/>
+            </a:solidFill>
+          </a:ln>
+        </p:spPr>
+        <p:style>
+          <a:lnRef idx="1">
+            <a:schemeClr val="accent1"/>
+          </a:lnRef>
+          <a:fillRef idx="3">
+            <a:schemeClr val="accent1"/>
+          </a:fillRef>
+          <a:effectRef idx="2">
+            <a:schemeClr val="accent1"/>
+          </a:effectRef>
+          <a:fontRef idx="minor">
+            <a:schemeClr val="lt1"/>
+          </a:fontRef>
+        </p:style>
+        <p:txBody>
+          <a:bodyPr rtlCol="0" anchor="ctr"/>
+          <a:lstStyle/>
+          <a:p>
             <a:pPr algn="ctr"/>
           </a:p>
         </p:txBody>
       </p:sp>
-      <p:pic>
-        <p:nvPicPr>
-          <p:cNvPr id="9" name="Picture 8" descr="app_offline_settings.png"/>
-          <p:cNvPicPr>
-            <a:picLocks noChangeAspect="1"/>
-          </p:cNvPicPr>
-          <p:nvPr/>
-        </p:nvPicPr>
-        <p:blipFill>
-          <a:blip r:embed="rId2"/>
-          <a:stretch>
-            <a:fillRect/>
-          </a:stretch>
-        </p:blipFill>
-        <p:spPr>
-          <a:xfrm>
-            <a:off x="8851392" y="1764792"/>
-            <a:ext cx="2505456" cy="4242816"/>
+      <p:sp>
+        <p:nvSpPr>
+          <p:cNvPr id="10" name="Rounded Rectangle 9"/>
+          <p:cNvSpPr/>
+          <p:nvPr/>
+        </p:nvSpPr>
+        <p:spPr>
+          <a:xfrm>
+            <a:off x="3566160" y="1874520"/>
+            <a:ext cx="2286000" cy="365760"/>
+          </a:xfrm>
+          <a:prstGeom prst="roundRect">
+            <a:avLst/>
+          </a:prstGeom>
+          <a:solidFill>
+            <a:srgbClr val="A84D0E"/>
+          </a:solidFill>
+          <a:ln>
+            <a:noFill/>
+          </a:ln>
+        </p:spPr>
+        <p:style>
+          <a:lnRef idx="1">
+            <a:schemeClr val="accent1"/>
+          </a:lnRef>
+          <a:fillRef idx="3">
+            <a:schemeClr val="accent1"/>
+          </a:fillRef>
+          <a:effectRef idx="2">
+            <a:schemeClr val="accent1"/>
+          </a:effectRef>
+          <a:fontRef idx="minor">
+            <a:schemeClr val="lt1"/>
+          </a:fontRef>
+        </p:style>
+        <p:txBody>
+          <a:bodyPr rtlCol="0" anchor="ctr"/>
+          <a:lstStyle/>
+          <a:p>
+            <a:pPr algn="ctr">
+              <a:defRPr sz="900" b="1">
+                <a:solidFill>
+                  <a:srgbClr val="FFFFFF"/>
+                </a:solidFill>
+              </a:defRPr>
+            </a:pPr>
+            <a:r>
+              <a:t>Q1-Q2 2027</a:t>
+            </a:r>
+          </a:p>
+        </p:txBody>
+      </p:sp>
+      <p:sp>
+        <p:nvSpPr>
+          <p:cNvPr id="11" name="TextBox 10"/>
+          <p:cNvSpPr txBox="1"/>
+          <p:nvPr/>
+        </p:nvSpPr>
+        <p:spPr>
+          <a:xfrm>
+            <a:off x="3566160" y="2331720"/>
+            <a:ext cx="2286000" cy="3657600"/>
           </a:xfrm>
           <a:prstGeom prst="rect">
             <a:avLst/>
           </a:prstGeom>
-        </p:spPr>
-      </p:pic>
-      <p:sp>
-        <p:nvSpPr>
-          <p:cNvPr id="10" name="TextBox 9"/>
+          <a:noFill/>
+        </p:spPr>
+        <p:txBody>
+          <a:bodyPr wrap="square">
+            <a:spAutoFit/>
+          </a:bodyPr>
+          <a:lstStyle/>
+          <a:p>
+            <a:pPr>
+              <a:spcAft>
+                <a:spcPts val="1000"/>
+              </a:spcAft>
+              <a:defRPr sz="1200" b="1">
+                <a:solidFill>
+                  <a:srgbClr val="0B3D33"/>
+                </a:solidFill>
+                <a:latin typeface="Georgia"/>
+              </a:defRPr>
+            </a:pPr>
+            <a:r>
+              <a:t>Phase 2: Transit Node Pilot</a:t>
+            </a:r>
+          </a:p>
+          <a:p>
+            <a:pPr>
+              <a:spcAft>
+                <a:spcPts val="500"/>
+              </a:spcAft>
+              <a:defRPr sz="919">
+                <a:solidFill>
+                  <a:srgbClr val="5F6E67"/>
+                </a:solidFill>
+              </a:defRPr>
+            </a:pPr>
+            <a:r>
+              <a:t>• QR kiosks at Jammu Tawi &amp; Katra concourses</a:t>
+            </a:r>
+          </a:p>
+          <a:p>
+            <a:pPr>
+              <a:spcAft>
+                <a:spcPts val="500"/>
+              </a:spcAft>
+              <a:defRPr sz="919">
+                <a:solidFill>
+                  <a:srgbClr val="5F6E67"/>
+                </a:solidFill>
+              </a:defRPr>
+            </a:pPr>
+            <a:r>
+              <a:t>• J&amp;K Smart City e-bus live GPS sync</a:t>
+            </a:r>
+          </a:p>
+          <a:p>
+            <a:pPr>
+              <a:spcAft>
+                <a:spcPts val="500"/>
+              </a:spcAft>
+              <a:defRPr sz="919">
+                <a:solidFill>
+                  <a:srgbClr val="5F6E67"/>
+                </a:solidFill>
+              </a:defRPr>
+            </a:pPr>
+            <a:r>
+              <a:t>• Onboard 50+ verified local dhabas &amp; GI shops</a:t>
+            </a:r>
+          </a:p>
+          <a:p>
+            <a:pPr>
+              <a:spcAft>
+                <a:spcPts val="500"/>
+              </a:spcAft>
+              <a:defRPr sz="919">
+                <a:solidFill>
+                  <a:srgbClr val="5F6E67"/>
+                </a:solidFill>
+              </a:defRPr>
+            </a:pPr>
+            <a:r>
+              <a:t>• Target: 50,000 monthly active yatris</a:t>
+            </a:r>
+          </a:p>
+        </p:txBody>
+      </p:sp>
+      <p:sp>
+        <p:nvSpPr>
+          <p:cNvPr id="12" name="Rounded Rectangle 11"/>
+          <p:cNvSpPr/>
+          <p:nvPr/>
+        </p:nvSpPr>
+        <p:spPr>
+          <a:xfrm>
+            <a:off x="6126480" y="1691640"/>
+            <a:ext cx="2560320" cy="4480560"/>
+          </a:xfrm>
+          <a:prstGeom prst="roundRect">
+            <a:avLst/>
+          </a:prstGeom>
+          <a:solidFill>
+            <a:srgbClr val="FFFFFF"/>
+          </a:solidFill>
+          <a:ln w="12700">
+            <a:solidFill>
+              <a:srgbClr val="E4DCD2"/>
+            </a:solidFill>
+          </a:ln>
+        </p:spPr>
+        <p:style>
+          <a:lnRef idx="1">
+            <a:schemeClr val="accent1"/>
+          </a:lnRef>
+          <a:fillRef idx="3">
+            <a:schemeClr val="accent1"/>
+          </a:fillRef>
+          <a:effectRef idx="2">
+            <a:schemeClr val="accent1"/>
+          </a:effectRef>
+          <a:fontRef idx="minor">
+            <a:schemeClr val="lt1"/>
+          </a:fontRef>
+        </p:style>
+        <p:txBody>
+          <a:bodyPr rtlCol="0" anchor="ctr"/>
+          <a:lstStyle/>
+          <a:p>
+            <a:pPr algn="ctr"/>
+          </a:p>
+        </p:txBody>
+      </p:sp>
+      <p:sp>
+        <p:nvSpPr>
+          <p:cNvPr id="13" name="Rounded Rectangle 12"/>
+          <p:cNvSpPr/>
+          <p:nvPr/>
+        </p:nvSpPr>
+        <p:spPr>
+          <a:xfrm>
+            <a:off x="6263640" y="1874520"/>
+            <a:ext cx="2286000" cy="365760"/>
+          </a:xfrm>
+          <a:prstGeom prst="roundRect">
+            <a:avLst/>
+          </a:prstGeom>
+          <a:solidFill>
+            <a:srgbClr val="0B3D33"/>
+          </a:solidFill>
+          <a:ln>
+            <a:noFill/>
+          </a:ln>
+        </p:spPr>
+        <p:style>
+          <a:lnRef idx="1">
+            <a:schemeClr val="accent1"/>
+          </a:lnRef>
+          <a:fillRef idx="3">
+            <a:schemeClr val="accent1"/>
+          </a:fillRef>
+          <a:effectRef idx="2">
+            <a:schemeClr val="accent1"/>
+          </a:effectRef>
+          <a:fontRef idx="minor">
+            <a:schemeClr val="lt1"/>
+          </a:fontRef>
+        </p:style>
+        <p:txBody>
+          <a:bodyPr rtlCol="0" anchor="ctr"/>
+          <a:lstStyle/>
+          <a:p>
+            <a:pPr algn="ctr">
+              <a:defRPr sz="900" b="1">
+                <a:solidFill>
+                  <a:srgbClr val="FFFFFF"/>
+                </a:solidFill>
+              </a:defRPr>
+            </a:pPr>
+            <a:r>
+              <a:t>Q3 2027</a:t>
+            </a:r>
+          </a:p>
+        </p:txBody>
+      </p:sp>
+      <p:sp>
+        <p:nvSpPr>
+          <p:cNvPr id="14" name="TextBox 13"/>
+          <p:cNvSpPr txBox="1"/>
+          <p:nvPr/>
+        </p:nvSpPr>
+        <p:spPr>
+          <a:xfrm>
+            <a:off x="6263640" y="2331720"/>
+            <a:ext cx="2286000" cy="3657600"/>
+          </a:xfrm>
+          <a:prstGeom prst="rect">
+            <a:avLst/>
+          </a:prstGeom>
+          <a:noFill/>
+        </p:spPr>
+        <p:txBody>
+          <a:bodyPr wrap="square">
+            <a:spAutoFit/>
+          </a:bodyPr>
+          <a:lstStyle/>
+          <a:p>
+            <a:pPr>
+              <a:spcAft>
+                <a:spcPts val="1000"/>
+              </a:spcAft>
+              <a:defRPr sz="1200" b="1">
+                <a:solidFill>
+                  <a:srgbClr val="0B3D33"/>
+                </a:solidFill>
+                <a:latin typeface="Georgia"/>
+              </a:defRPr>
+            </a:pPr>
+            <a:r>
+              <a:t>Phase 3: Institutional Sync</a:t>
+            </a:r>
+          </a:p>
+          <a:p>
+            <a:pPr>
+              <a:spcAft>
+                <a:spcPts val="500"/>
+              </a:spcAft>
+              <a:defRPr sz="919">
+                <a:solidFill>
+                  <a:srgbClr val="5F6E67"/>
+                </a:solidFill>
+              </a:defRPr>
+            </a:pPr>
+            <a:r>
+              <a:t>• Official J&amp;K Tourism Directorate endorsement</a:t>
+            </a:r>
+          </a:p>
+          <a:p>
+            <a:pPr>
+              <a:spcAft>
+                <a:spcPts val="500"/>
+              </a:spcAft>
+              <a:defRPr sz="919">
+                <a:solidFill>
+                  <a:srgbClr val="5F6E67"/>
+                </a:solidFill>
+              </a:defRPr>
+            </a:pPr>
+            <a:r>
+              <a:t>• SMVDSB Katra battery-car &amp; RFID tie-in</a:t>
+            </a:r>
+          </a:p>
+          <a:p>
+            <a:pPr>
+              <a:spcAft>
+                <a:spcPts val="500"/>
+              </a:spcAft>
+              <a:defRPr sz="919">
+                <a:solidFill>
+                  <a:srgbClr val="5F6E67"/>
+                </a:solidFill>
+              </a:defRPr>
+            </a:pPr>
+            <a:r>
+              <a:t>• Northern Railway Yatri Niwas booking cross-links</a:t>
+            </a:r>
+          </a:p>
+          <a:p>
+            <a:pPr>
+              <a:spcAft>
+                <a:spcPts val="500"/>
+              </a:spcAft>
+              <a:defRPr sz="919">
+                <a:solidFill>
+                  <a:srgbClr val="5F6E67"/>
+                </a:solidFill>
+              </a:defRPr>
+            </a:pPr>
+            <a:r>
+              <a:t>• Target: 250,000 active pilgrim users</a:t>
+            </a:r>
+          </a:p>
+        </p:txBody>
+      </p:sp>
+      <p:sp>
+        <p:nvSpPr>
+          <p:cNvPr id="15" name="Rounded Rectangle 14"/>
+          <p:cNvSpPr/>
+          <p:nvPr/>
+        </p:nvSpPr>
+        <p:spPr>
+          <a:xfrm>
+            <a:off x="8823960" y="1691640"/>
+            <a:ext cx="2560320" cy="4480560"/>
+          </a:xfrm>
+          <a:prstGeom prst="roundRect">
+            <a:avLst/>
+          </a:prstGeom>
+          <a:solidFill>
+            <a:srgbClr val="FFFFFF"/>
+          </a:solidFill>
+          <a:ln w="12700">
+            <a:solidFill>
+              <a:srgbClr val="E4DCD2"/>
+            </a:solidFill>
+          </a:ln>
+        </p:spPr>
+        <p:style>
+          <a:lnRef idx="1">
+            <a:schemeClr val="accent1"/>
+          </a:lnRef>
+          <a:fillRef idx="3">
+            <a:schemeClr val="accent1"/>
+          </a:fillRef>
+          <a:effectRef idx="2">
+            <a:schemeClr val="accent1"/>
+          </a:effectRef>
+          <a:fontRef idx="minor">
+            <a:schemeClr val="lt1"/>
+          </a:fontRef>
+        </p:style>
+        <p:txBody>
+          <a:bodyPr rtlCol="0" anchor="ctr"/>
+          <a:lstStyle/>
+          <a:p>
+            <a:pPr algn="ctr"/>
+          </a:p>
+        </p:txBody>
+      </p:sp>
+      <p:sp>
+        <p:nvSpPr>
+          <p:cNvPr id="16" name="Rounded Rectangle 15"/>
+          <p:cNvSpPr/>
+          <p:nvPr/>
+        </p:nvSpPr>
+        <p:spPr>
+          <a:xfrm>
+            <a:off x="8961120" y="1874520"/>
+            <a:ext cx="2286000" cy="365760"/>
+          </a:xfrm>
+          <a:prstGeom prst="roundRect">
+            <a:avLst/>
+          </a:prstGeom>
+          <a:solidFill>
+            <a:srgbClr val="D98210"/>
+          </a:solidFill>
+          <a:ln>
+            <a:noFill/>
+          </a:ln>
+        </p:spPr>
+        <p:style>
+          <a:lnRef idx="1">
+            <a:schemeClr val="accent1"/>
+          </a:lnRef>
+          <a:fillRef idx="3">
+            <a:schemeClr val="accent1"/>
+          </a:fillRef>
+          <a:effectRef idx="2">
+            <a:schemeClr val="accent1"/>
+          </a:effectRef>
+          <a:fontRef idx="minor">
+            <a:schemeClr val="lt1"/>
+          </a:fontRef>
+        </p:style>
+        <p:txBody>
+          <a:bodyPr rtlCol="0" anchor="ctr"/>
+          <a:lstStyle/>
+          <a:p>
+            <a:pPr algn="ctr">
+              <a:defRPr sz="900" b="1">
+                <a:solidFill>
+                  <a:srgbClr val="FFFFFF"/>
+                </a:solidFill>
+              </a:defRPr>
+            </a:pPr>
+            <a:r>
+              <a:t>Q4 2027+</a:t>
+            </a:r>
+          </a:p>
+        </p:txBody>
+      </p:sp>
+      <p:sp>
+        <p:nvSpPr>
+          <p:cNvPr id="17" name="TextBox 16"/>
+          <p:cNvSpPr txBox="1"/>
+          <p:nvPr/>
+        </p:nvSpPr>
+        <p:spPr>
+          <a:xfrm>
+            <a:off x="8961120" y="2331720"/>
+            <a:ext cx="2286000" cy="3657600"/>
+          </a:xfrm>
+          <a:prstGeom prst="rect">
+            <a:avLst/>
+          </a:prstGeom>
+          <a:noFill/>
+        </p:spPr>
+        <p:txBody>
+          <a:bodyPr wrap="square">
+            <a:spAutoFit/>
+          </a:bodyPr>
+          <a:lstStyle/>
+          <a:p>
+            <a:pPr>
+              <a:spcAft>
+                <a:spcPts val="1000"/>
+              </a:spcAft>
+              <a:defRPr sz="1200" b="1">
+                <a:solidFill>
+                  <a:srgbClr val="0B3D33"/>
+                </a:solidFill>
+                <a:latin typeface="Georgia"/>
+              </a:defRPr>
+            </a:pPr>
+            <a:r>
+              <a:t>Phase 4: Ecosystem Scale</a:t>
+            </a:r>
+          </a:p>
+          <a:p>
+            <a:pPr>
+              <a:spcAft>
+                <a:spcPts val="500"/>
+              </a:spcAft>
+              <a:defRPr sz="919">
+                <a:solidFill>
+                  <a:srgbClr val="5F6E67"/>
+                </a:solidFill>
+              </a:defRPr>
+            </a:pPr>
+            <a:r>
+              <a:t>• Expansion to Bhaderwah, Kishtwar, Poonch &amp; Rajouri</a:t>
+            </a:r>
+          </a:p>
+          <a:p>
+            <a:pPr>
+              <a:spcAft>
+                <a:spcPts val="500"/>
+              </a:spcAft>
+              <a:defRPr sz="919">
+                <a:solidFill>
+                  <a:srgbClr val="5F6E67"/>
+                </a:solidFill>
+              </a:defRPr>
+            </a:pPr>
+            <a:r>
+              <a:t>• Audio heritage guides in Dogri, Hindi &amp; English</a:t>
+            </a:r>
+          </a:p>
+          <a:p>
+            <a:pPr>
+              <a:spcAft>
+                <a:spcPts val="500"/>
+              </a:spcAft>
+              <a:defRPr sz="919">
+                <a:solidFill>
+                  <a:srgbClr val="5F6E67"/>
+                </a:solidFill>
+              </a:defRPr>
+            </a:pPr>
+            <a:r>
+              <a:t>• Open-source blueprint for Varanasi &amp; Tirupati</a:t>
+            </a:r>
+          </a:p>
+          <a:p>
+            <a:pPr>
+              <a:spcAft>
+                <a:spcPts val="500"/>
+              </a:spcAft>
+              <a:defRPr sz="919">
+                <a:solidFill>
+                  <a:srgbClr val="5F6E67"/>
+                </a:solidFill>
+              </a:defRPr>
+            </a:pPr>
+            <a:r>
+              <a:t>• Self-sustaining civic non-commission model</a:t>
+            </a:r>
+          </a:p>
+        </p:txBody>
+      </p:sp>
+      <p:sp>
+        <p:nvSpPr>
+          <p:cNvPr id="18" name="TextBox 17"/>
           <p:cNvSpPr txBox="1"/>
           <p:nvPr/>
         </p:nvSpPr>
@@ -8691,7 +9402,7 @@
             <a:pPr>
               <a:defRPr sz="900">
                 <a:solidFill>
-                  <a:srgbClr val="6C7A73"/>
+                  <a:srgbClr val="5F6E67"/>
                 </a:solidFill>
                 <a:latin typeface="Arial"/>
               </a:defRPr>
@@ -8735,7 +9446,7 @@
             <a:avLst/>
           </a:prstGeom>
           <a:solidFill>
-            <a:srgbClr val="FAF8F4"/>
+            <a:srgbClr val="FAF7F2"/>
           </a:solidFill>
           <a:ln>
             <a:noFill/>
@@ -8788,7 +9499,7 @@
             <a:pPr>
               <a:defRPr sz="1050" b="1">
                 <a:solidFill>
-                  <a:srgbClr val="9E4A0C"/>
+                  <a:srgbClr val="A84D0E"/>
                 </a:solidFill>
                 <a:latin typeface="Arial"/>
               </a:defRPr>
@@ -8807,7 +9518,7 @@
         </p:nvSpPr>
         <p:spPr>
           <a:xfrm>
-            <a:off x="731520" y="685800"/>
+            <a:off x="731520" y="676656"/>
             <a:ext cx="10698480" cy="594360"/>
           </a:xfrm>
           <a:prstGeom prst="rect">
@@ -8824,7 +9535,7 @@
             <a:pPr>
               <a:defRPr sz="2300" b="1">
                 <a:solidFill>
-                  <a:srgbClr val="085444"/>
+                  <a:srgbClr val="0B3D33"/>
                 </a:solidFill>
                 <a:latin typeface="Georgia"/>
               </a:defRPr>
@@ -8843,7 +9554,7 @@
         </p:nvSpPr>
         <p:spPr>
           <a:xfrm>
-            <a:off x="731520" y="1261872"/>
+            <a:off x="731520" y="1243584"/>
             <a:ext cx="10698480" cy="365760"/>
           </a:xfrm>
           <a:prstGeom prst="rect">
@@ -8858,9 +9569,9 @@
           <a:lstStyle/>
           <a:p>
             <a:pPr>
-              <a:defRPr sz="1200">
-                <a:solidFill>
-                  <a:srgbClr val="6C7A73"/>
+              <a:defRPr sz="1150">
+                <a:solidFill>
+                  <a:srgbClr val="5F6E67"/>
                 </a:solidFill>
                 <a:latin typeface="Arial"/>
               </a:defRPr>
@@ -8880,7 +9591,7 @@
         <p:spPr>
           <a:xfrm>
             <a:off x="731520" y="1691640"/>
-            <a:ext cx="7772400" cy="4389120"/>
+            <a:ext cx="3504895" cy="4480560"/>
           </a:xfrm>
           <a:prstGeom prst="roundRect">
             <a:avLst/>
@@ -8890,7 +9601,7 @@
           </a:solidFill>
           <a:ln w="12700">
             <a:solidFill>
-              <a:srgbClr val="E6DED4"/>
+              <a:srgbClr val="E4DCD2"/>
             </a:solidFill>
           </a:ln>
         </p:spPr>
@@ -8924,8 +9635,8 @@
         </p:nvSpPr>
         <p:spPr>
           <a:xfrm>
-            <a:off x="914400" y="1783080"/>
-            <a:ext cx="7406640" cy="4206240"/>
+            <a:off x="914400" y="1874520"/>
+            <a:ext cx="3139135" cy="4114800"/>
           </a:xfrm>
           <a:prstGeom prst="rect">
             <a:avLst/>
@@ -8939,182 +9650,90 @@
           <a:lstStyle/>
           <a:p>
             <a:pPr>
+              <a:defRPr sz="1350" b="1">
+                <a:solidFill>
+                  <a:srgbClr val="0B3D33"/>
+                </a:solidFill>
+                <a:latin typeface="Georgia"/>
+              </a:defRPr>
+            </a:pPr>
+            <a:r>
+              <a:t>🔒 Zero-Surveillance Privacy</a:t>
+            </a:r>
+          </a:p>
+          <a:p>
+            <a:pPr>
               <a:spcAft>
-                <a:spcPts val="400"/>
+                <a:spcPts val="1000"/>
               </a:spcAft>
-              <a:defRPr sz="1200" b="1">
-                <a:solidFill>
-                  <a:srgbClr val="085444"/>
-                </a:solidFill>
-              </a:defRPr>
-            </a:pPr>
-            <a:r>
-              <a:t>🔒 Zero-Knowledge Privacy (Google Play Compliant)</a:t>
+              <a:defRPr sz="1000" b="1">
+                <a:solidFill>
+                  <a:srgbClr val="A84D0E"/>
+                </a:solidFill>
+              </a:defRPr>
+            </a:pPr>
+            <a:r>
+              <a:t>Google Play &amp; Privacy Act Compliant</a:t>
             </a:r>
           </a:p>
           <a:p>
             <a:pPr>
               <a:spcAft>
-                <a:spcPts val="200"/>
+                <a:spcPts val="600"/>
               </a:spcAft>
-              <a:defRPr sz="1000">
-                <a:solidFill>
-                  <a:srgbClr val="6C7A73"/>
-                </a:solidFill>
-              </a:defRPr>
-            </a:pPr>
-            <a:r>
-              <a:t>•  100% of user data, bookmarks, and custom plans remain strictly on-device in IndexedDB.</a:t>
+              <a:defRPr sz="950">
+                <a:solidFill>
+                  <a:srgbClr val="5F6E67"/>
+                </a:solidFill>
+              </a:defRPr>
+            </a:pPr>
+            <a:r>
+              <a:t>• 100% of user data, bookmarks, and custom plans remain strictly on-device in IndexedDB.</a:t>
             </a:r>
           </a:p>
           <a:p>
             <a:pPr>
               <a:spcAft>
-                <a:spcPts val="200"/>
+                <a:spcPts val="600"/>
               </a:spcAft>
-              <a:defRPr sz="1000">
-                <a:solidFill>
-                  <a:srgbClr val="6C7A73"/>
-                </a:solidFill>
-              </a:defRPr>
-            </a:pPr>
-            <a:r>
-              <a:t>•  Zero tracking cookies, zero third-party telemetry, zero location data monetization.</a:t>
+              <a:defRPr sz="950">
+                <a:solidFill>
+                  <a:srgbClr val="5F6E67"/>
+                </a:solidFill>
+              </a:defRPr>
+            </a:pPr>
+            <a:r>
+              <a:t>• Zero tracking cookies, zero third-party telemetry, zero location data monetization.</a:t>
             </a:r>
           </a:p>
           <a:p>
             <a:pPr>
               <a:spcAft>
-                <a:spcPts val="200"/>
+                <a:spcPts val="600"/>
               </a:spcAft>
-              <a:defRPr sz="1000">
-                <a:solidFill>
-                  <a:srgbClr val="6C7A73"/>
-                </a:solidFill>
-              </a:defRPr>
-            </a:pPr>
-            <a:r>
-              <a:t>•  1-Tap permanent account &amp; local storage wipe button directly in Settings.</a:t>
+              <a:defRPr sz="950">
+                <a:solidFill>
+                  <a:srgbClr val="5F6E67"/>
+                </a:solidFill>
+              </a:defRPr>
+            </a:pPr>
+            <a:r>
+              <a:t>• Zero mandatory registration barrier: full functionality available to guests.</a:t>
             </a:r>
           </a:p>
           <a:p>
             <a:pPr>
               <a:spcAft>
-                <a:spcPts val="400"/>
+                <a:spcPts val="600"/>
               </a:spcAft>
-              <a:defRPr sz="1200" b="1">
-                <a:solidFill>
-                  <a:srgbClr val="085444"/>
-                </a:solidFill>
-              </a:defRPr>
-            </a:pPr>
-            <a:r>
-              <a:t>🌱 Ultra-Low Resource Footprint</a:t>
-            </a:r>
-          </a:p>
-          <a:p>
-            <a:pPr>
-              <a:spcAft>
-                <a:spcPts val="200"/>
-              </a:spcAft>
-              <a:defRPr sz="1000">
-                <a:solidFill>
-                  <a:srgbClr val="6C7A73"/>
-                </a:solidFill>
-              </a:defRPr>
-            </a:pPr>
-            <a:r>
-              <a:t>•  Lightweight 5.5 MB APK and &lt;2 MB compressed web bundle.</a:t>
-            </a:r>
-          </a:p>
-          <a:p>
-            <a:pPr>
-              <a:spcAft>
-                <a:spcPts val="200"/>
-              </a:spcAft>
-              <a:defRPr sz="1000">
-                <a:solidFill>
-                  <a:srgbClr val="6C7A73"/>
-                </a:solidFill>
-              </a:defRPr>
-            </a:pPr>
-            <a:r>
-              <a:t>•  Runs smoothly on budget ₹6,000 Android phones without thermal throttling.</a:t>
-            </a:r>
-          </a:p>
-          <a:p>
-            <a:pPr>
-              <a:spcAft>
-                <a:spcPts val="200"/>
-              </a:spcAft>
-              <a:defRPr sz="1000">
-                <a:solidFill>
-                  <a:srgbClr val="6C7A73"/>
-                </a:solidFill>
-              </a:defRPr>
-            </a:pPr>
-            <a:r>
-              <a:t>•  OLED-friendly dark mode and high-contrast WCAG 2.1 AA modes save battery during travel.</a:t>
-            </a:r>
-          </a:p>
-          <a:p>
-            <a:pPr>
-              <a:spcAft>
-                <a:spcPts val="400"/>
-              </a:spcAft>
-              <a:defRPr sz="1200" b="1">
-                <a:solidFill>
-                  <a:srgbClr val="085444"/>
-                </a:solidFill>
-              </a:defRPr>
-            </a:pPr>
-            <a:r>
-              <a:t>🤝 Sustainable Public-Private Civic Model</a:t>
-            </a:r>
-          </a:p>
-          <a:p>
-            <a:pPr>
-              <a:spcAft>
-                <a:spcPts val="200"/>
-              </a:spcAft>
-              <a:defRPr sz="1000">
-                <a:solidFill>
-                  <a:srgbClr val="6C7A73"/>
-                </a:solidFill>
-              </a:defRPr>
-            </a:pPr>
-            <a:r>
-              <a:t>•  Non-commission directory preventing price distortion for travelers.</a:t>
-            </a:r>
-          </a:p>
-          <a:p>
-            <a:pPr>
-              <a:spcAft>
-                <a:spcPts val="200"/>
-              </a:spcAft>
-              <a:defRPr sz="1000">
-                <a:solidFill>
-                  <a:srgbClr val="6C7A73"/>
-                </a:solidFill>
-              </a:defRPr>
-            </a:pPr>
-            <a:r>
-              <a:t>•  Verified artisan and homestay listings supported by J&amp;K Tourism development authorities.</a:t>
-            </a:r>
-          </a:p>
-          <a:p>
-            <a:pPr>
-              <a:spcAft>
-                <a:spcPts val="200"/>
-              </a:spcAft>
-              <a:defRPr sz="1000">
-                <a:solidFill>
-                  <a:srgbClr val="6C7A73"/>
-                </a:solidFill>
-              </a:defRPr>
-            </a:pPr>
-            <a:r>
-              <a:t>•  Open-source data structures contributing back to OpenStreetMap and civic archives.</a:t>
+              <a:defRPr sz="950">
+                <a:solidFill>
+                  <a:srgbClr val="5F6E67"/>
+                </a:solidFill>
+              </a:defRPr>
+            </a:pPr>
+            <a:r>
+              <a:t>• 1-Tap permanent account &amp; local storage wipe button directly in Settings.</a:t>
             </a:r>
           </a:p>
         </p:txBody>
@@ -9127,18 +9746,18 @@
         </p:nvSpPr>
         <p:spPr>
           <a:xfrm>
-            <a:off x="8778240" y="1691640"/>
-            <a:ext cx="2651760" cy="4389120"/>
+            <a:off x="4343400" y="1691640"/>
+            <a:ext cx="3504895" cy="4480560"/>
           </a:xfrm>
           <a:prstGeom prst="roundRect">
             <a:avLst/>
           </a:prstGeom>
           <a:solidFill>
-            <a:srgbClr val="121816"/>
+            <a:srgbClr val="FFFFFF"/>
           </a:solidFill>
-          <a:ln w="19050">
+          <a:ln w="12700">
             <a:solidFill>
-              <a:srgbClr val="D97706"/>
+              <a:srgbClr val="E4DCD2"/>
             </a:solidFill>
           </a:ln>
         </p:spPr>
@@ -9164,33 +9783,276 @@
           </a:p>
         </p:txBody>
       </p:sp>
-      <p:pic>
-        <p:nvPicPr>
-          <p:cNvPr id="9" name="Picture 8" descr="app_dogri_food.png"/>
-          <p:cNvPicPr>
-            <a:picLocks noChangeAspect="1"/>
-          </p:cNvPicPr>
-          <p:nvPr/>
-        </p:nvPicPr>
-        <p:blipFill>
-          <a:blip r:embed="rId2"/>
-          <a:stretch>
-            <a:fillRect/>
-          </a:stretch>
-        </p:blipFill>
-        <p:spPr>
-          <a:xfrm>
-            <a:off x="8851392" y="1764792"/>
-            <a:ext cx="2505456" cy="4242816"/>
+      <p:sp>
+        <p:nvSpPr>
+          <p:cNvPr id="9" name="TextBox 8"/>
+          <p:cNvSpPr txBox="1"/>
+          <p:nvPr/>
+        </p:nvSpPr>
+        <p:spPr>
+          <a:xfrm>
+            <a:off x="4526280" y="1874520"/>
+            <a:ext cx="3139135" cy="4114800"/>
           </a:xfrm>
           <a:prstGeom prst="rect">
             <a:avLst/>
           </a:prstGeom>
-        </p:spPr>
-      </p:pic>
-      <p:sp>
-        <p:nvSpPr>
-          <p:cNvPr id="10" name="TextBox 9"/>
+          <a:noFill/>
+        </p:spPr>
+        <p:txBody>
+          <a:bodyPr wrap="square">
+            <a:spAutoFit/>
+          </a:bodyPr>
+          <a:lstStyle/>
+          <a:p>
+            <a:pPr>
+              <a:defRPr sz="1350" b="1">
+                <a:solidFill>
+                  <a:srgbClr val="0B3D33"/>
+                </a:solidFill>
+                <a:latin typeface="Georgia"/>
+              </a:defRPr>
+            </a:pPr>
+            <a:r>
+              <a:t>🌱 Ultra-Low Resource Footprint</a:t>
+            </a:r>
+          </a:p>
+          <a:p>
+            <a:pPr>
+              <a:spcAft>
+                <a:spcPts val="1000"/>
+              </a:spcAft>
+              <a:defRPr sz="1000" b="1">
+                <a:solidFill>
+                  <a:srgbClr val="A84D0E"/>
+                </a:solidFill>
+              </a:defRPr>
+            </a:pPr>
+            <a:r>
+              <a:t>Engineered for Mountain Transit</a:t>
+            </a:r>
+          </a:p>
+          <a:p>
+            <a:pPr>
+              <a:spcAft>
+                <a:spcPts val="600"/>
+              </a:spcAft>
+              <a:defRPr sz="950">
+                <a:solidFill>
+                  <a:srgbClr val="5F6E67"/>
+                </a:solidFill>
+              </a:defRPr>
+            </a:pPr>
+            <a:r>
+              <a:t>• Lightweight 5.5 MB APK and &lt;2 MB compressed web bundle.</a:t>
+            </a:r>
+          </a:p>
+          <a:p>
+            <a:pPr>
+              <a:spcAft>
+                <a:spcPts val="600"/>
+              </a:spcAft>
+              <a:defRPr sz="950">
+                <a:solidFill>
+                  <a:srgbClr val="5F6E67"/>
+                </a:solidFill>
+              </a:defRPr>
+            </a:pPr>
+            <a:r>
+              <a:t>• Runs smoothly on budget ₹6,000 Android phones without thermal throttling.</a:t>
+            </a:r>
+          </a:p>
+          <a:p>
+            <a:pPr>
+              <a:spcAft>
+                <a:spcPts val="600"/>
+              </a:spcAft>
+              <a:defRPr sz="950">
+                <a:solidFill>
+                  <a:srgbClr val="5F6E67"/>
+                </a:solidFill>
+              </a:defRPr>
+            </a:pPr>
+            <a:r>
+              <a:t>• Offline-first vector maps consume zero background cellular data.</a:t>
+            </a:r>
+          </a:p>
+          <a:p>
+            <a:pPr>
+              <a:spcAft>
+                <a:spcPts val="600"/>
+              </a:spcAft>
+              <a:defRPr sz="950">
+                <a:solidFill>
+                  <a:srgbClr val="5F6E67"/>
+                </a:solidFill>
+              </a:defRPr>
+            </a:pPr>
+            <a:r>
+              <a:t>• OLED-friendly dark mode and high-contrast WCAG 2.1 AA modes conserve traveler battery.</a:t>
+            </a:r>
+          </a:p>
+        </p:txBody>
+      </p:sp>
+      <p:sp>
+        <p:nvSpPr>
+          <p:cNvPr id="10" name="Rounded Rectangle 9"/>
+          <p:cNvSpPr/>
+          <p:nvPr/>
+        </p:nvSpPr>
+        <p:spPr>
+          <a:xfrm>
+            <a:off x="7955280" y="1691640"/>
+            <a:ext cx="3504895" cy="4480560"/>
+          </a:xfrm>
+          <a:prstGeom prst="roundRect">
+            <a:avLst/>
+          </a:prstGeom>
+          <a:solidFill>
+            <a:srgbClr val="FFFFFF"/>
+          </a:solidFill>
+          <a:ln w="12700">
+            <a:solidFill>
+              <a:srgbClr val="E4DCD2"/>
+            </a:solidFill>
+          </a:ln>
+        </p:spPr>
+        <p:style>
+          <a:lnRef idx="1">
+            <a:schemeClr val="accent1"/>
+          </a:lnRef>
+          <a:fillRef idx="3">
+            <a:schemeClr val="accent1"/>
+          </a:fillRef>
+          <a:effectRef idx="2">
+            <a:schemeClr val="accent1"/>
+          </a:effectRef>
+          <a:fontRef idx="minor">
+            <a:schemeClr val="lt1"/>
+          </a:fontRef>
+        </p:style>
+        <p:txBody>
+          <a:bodyPr rtlCol="0" anchor="ctr"/>
+          <a:lstStyle/>
+          <a:p>
+            <a:pPr algn="ctr"/>
+          </a:p>
+        </p:txBody>
+      </p:sp>
+      <p:sp>
+        <p:nvSpPr>
+          <p:cNvPr id="11" name="TextBox 10"/>
+          <p:cNvSpPr txBox="1"/>
+          <p:nvPr/>
+        </p:nvSpPr>
+        <p:spPr>
+          <a:xfrm>
+            <a:off x="8138160" y="1874520"/>
+            <a:ext cx="3139135" cy="4114800"/>
+          </a:xfrm>
+          <a:prstGeom prst="rect">
+            <a:avLst/>
+          </a:prstGeom>
+          <a:noFill/>
+        </p:spPr>
+        <p:txBody>
+          <a:bodyPr wrap="square">
+            <a:spAutoFit/>
+          </a:bodyPr>
+          <a:lstStyle/>
+          <a:p>
+            <a:pPr>
+              <a:defRPr sz="1350" b="1">
+                <a:solidFill>
+                  <a:srgbClr val="0B3D33"/>
+                </a:solidFill>
+                <a:latin typeface="Georgia"/>
+              </a:defRPr>
+            </a:pPr>
+            <a:r>
+              <a:t>🤝 Sustainable Civic Model</a:t>
+            </a:r>
+          </a:p>
+          <a:p>
+            <a:pPr>
+              <a:spcAft>
+                <a:spcPts val="1000"/>
+              </a:spcAft>
+              <a:defRPr sz="1000" b="1">
+                <a:solidFill>
+                  <a:srgbClr val="A84D0E"/>
+                </a:solidFill>
+              </a:defRPr>
+            </a:pPr>
+            <a:r>
+              <a:t>Public Benefit, Non-Commission</a:t>
+            </a:r>
+          </a:p>
+          <a:p>
+            <a:pPr>
+              <a:spcAft>
+                <a:spcPts val="600"/>
+              </a:spcAft>
+              <a:defRPr sz="950">
+                <a:solidFill>
+                  <a:srgbClr val="5F6E67"/>
+                </a:solidFill>
+              </a:defRPr>
+            </a:pPr>
+            <a:r>
+              <a:t>• Non-commission directory preventing price inflation for travelers.</a:t>
+            </a:r>
+          </a:p>
+          <a:p>
+            <a:pPr>
+              <a:spcAft>
+                <a:spcPts val="600"/>
+              </a:spcAft>
+              <a:defRPr sz="950">
+                <a:solidFill>
+                  <a:srgbClr val="5F6E67"/>
+                </a:solidFill>
+              </a:defRPr>
+            </a:pPr>
+            <a:r>
+              <a:t>• Verified artisan and homestay listings supported by J&amp;K Tourism development authorities.</a:t>
+            </a:r>
+          </a:p>
+          <a:p>
+            <a:pPr>
+              <a:spcAft>
+                <a:spcPts val="600"/>
+              </a:spcAft>
+              <a:defRPr sz="950">
+                <a:solidFill>
+                  <a:srgbClr val="5F6E67"/>
+                </a:solidFill>
+              </a:defRPr>
+            </a:pPr>
+            <a:r>
+              <a:t>• Open-source data structures contributing back to OpenStreetMap and civic archives.</a:t>
+            </a:r>
+          </a:p>
+          <a:p>
+            <a:pPr>
+              <a:spcAft>
+                <a:spcPts val="600"/>
+              </a:spcAft>
+              <a:defRPr sz="950">
+                <a:solidFill>
+                  <a:srgbClr val="5F6E67"/>
+                </a:solidFill>
+              </a:defRPr>
+            </a:pPr>
+            <a:r>
+              <a:t>• Scalable cloud architecture hosted efficiently with negligible monthly operational cost.</a:t>
+            </a:r>
+          </a:p>
+        </p:txBody>
+      </p:sp>
+      <p:sp>
+        <p:nvSpPr>
+          <p:cNvPr id="12" name="TextBox 11"/>
           <p:cNvSpPr txBox="1"/>
           <p:nvPr/>
         </p:nvSpPr>
@@ -9213,7 +10075,7 @@
             <a:pPr>
               <a:defRPr sz="900">
                 <a:solidFill>
-                  <a:srgbClr val="6C7A73"/>
+                  <a:srgbClr val="5F6E67"/>
                 </a:solidFill>
                 <a:latin typeface="Arial"/>
               </a:defRPr>

--- a/JammuKhoj_Pitch_Deck_Final.pptx
+++ b/JammuKhoj_Pitch_Deck_Final.pptx
@@ -3728,7 +3728,7 @@
               </a:defRPr>
             </a:pPr>
             <a:r>
-              <a:t>Production Release • October 2026 • Live Demo: https://jammukhoj.in • 44/44 Verified High-Level Tests Passing</a:t>
+              <a:t>Production Release • October 2026 • Live Demo: https://bucolic-buttercream-966135.netlify.app/ • Domain: https://jammukhoj.in</a:t>
             </a:r>
           </a:p>
         </p:txBody>
@@ -4236,14 +4236,14 @@
           <a:lstStyle/>
           <a:p>
             <a:pPr algn="ctr">
-              <a:defRPr sz="1400" b="1">
+              <a:defRPr sz="1300" b="1">
                 <a:solidFill>
                   <a:srgbClr val="FFFFFF"/>
                 </a:solidFill>
               </a:defRPr>
             </a:pPr>
             <a:r>
-              <a:t>🌐 Live Application: https://jammukhoj.in   •   ✉️ Contact: support@jammukhoj.in</a:t>
+              <a:t>🌐 Live Demo: https://bucolic-buttercream-966135.netlify.app/   •   🌍 Domain: https://jammukhoj.in</a:t>
             </a:r>
           </a:p>
           <a:p>
@@ -4255,7 +4255,7 @@
               </a:defRPr>
             </a:pPr>
             <a:r>
-              <a:t>Open Source • 100% Offline Progressive Web App &amp; Android Ready • Built with Pride for Jammu</a:t>
+              <a:t>Open Source • 100% Offline Progressive Web App &amp; Android Ready • Contact: support@jammukhoj.in</a:t>
             </a:r>
           </a:p>
         </p:txBody>
@@ -5020,7 +5020,7 @@
               </a:defRPr>
             </a:pPr>
             <a:r>
-              <a:t>JammuKhoj • Smart Tourism &amp; Pilgrim Companion • Live App: https://jammukhoj.in</a:t>
+              <a:t>JammuKhoj • Smart Tourism &amp; Pilgrim Companion • Live Demo: https://bucolic-buttercream-966135.netlify.app/</a:t>
             </a:r>
           </a:p>
         </p:txBody>
@@ -5566,7 +5566,7 @@
               </a:defRPr>
             </a:pPr>
             <a:r>
-              <a:t>JammuKhoj • Smart Tourism &amp; Pilgrim Companion • Live App: https://jammukhoj.in</a:t>
+              <a:t>JammuKhoj • Smart Tourism &amp; Pilgrim Companion • Live Demo: https://bucolic-buttercream-966135.netlify.app/</a:t>
             </a:r>
           </a:p>
         </p:txBody>
@@ -6224,7 +6224,7 @@
               </a:defRPr>
             </a:pPr>
             <a:r>
-              <a:t>JammuKhoj • Smart Tourism &amp; Pilgrim Companion • Live App: https://jammukhoj.in</a:t>
+              <a:t>JammuKhoj • Smart Tourism &amp; Pilgrim Companion • Live Demo: https://bucolic-buttercream-966135.netlify.app/</a:t>
             </a:r>
           </a:p>
         </p:txBody>
@@ -6701,7 +6701,7 @@
               </a:defRPr>
             </a:pPr>
             <a:r>
-              <a:t>JammuKhoj • Smart Tourism &amp; Pilgrim Companion • Live App: https://jammukhoj.in</a:t>
+              <a:t>JammuKhoj • Smart Tourism &amp; Pilgrim Companion • Live Demo: https://bucolic-buttercream-966135.netlify.app/</a:t>
             </a:r>
           </a:p>
         </p:txBody>
@@ -7587,7 +7587,7 @@
               </a:defRPr>
             </a:pPr>
             <a:r>
-              <a:t>JammuKhoj • Smart Tourism &amp; Pilgrim Companion • Live App: https://jammukhoj.in</a:t>
+              <a:t>JammuKhoj • Smart Tourism &amp; Pilgrim Companion • Live Demo: https://bucolic-buttercream-966135.netlify.app/</a:t>
             </a:r>
           </a:p>
         </p:txBody>
@@ -8404,7 +8404,7 @@
               </a:defRPr>
             </a:pPr>
             <a:r>
-              <a:t>JammuKhoj • Smart Tourism &amp; Pilgrim Companion • Live App: https://jammukhoj.in</a:t>
+              <a:t>JammuKhoj • Smart Tourism &amp; Pilgrim Companion • Live Demo: https://bucolic-buttercream-966135.netlify.app/</a:t>
             </a:r>
           </a:p>
         </p:txBody>
@@ -9408,7 +9408,7 @@
               </a:defRPr>
             </a:pPr>
             <a:r>
-              <a:t>JammuKhoj • Smart Tourism &amp; Pilgrim Companion • Live App: https://jammukhoj.in</a:t>
+              <a:t>JammuKhoj • Smart Tourism &amp; Pilgrim Companion • Live Demo: https://bucolic-buttercream-966135.netlify.app/</a:t>
             </a:r>
           </a:p>
         </p:txBody>
@@ -10081,7 +10081,7 @@
               </a:defRPr>
             </a:pPr>
             <a:r>
-              <a:t>JammuKhoj • Smart Tourism &amp; Pilgrim Companion • Live App: https://jammukhoj.in</a:t>
+              <a:t>JammuKhoj • Smart Tourism &amp; Pilgrim Companion • Live Demo: https://bucolic-buttercream-966135.netlify.app/</a:t>
             </a:r>
           </a:p>
         </p:txBody>
